--- a/Courses/145060/units/unit-01-sequence-data-output/04-slides/exports/MCCTC_145060_Slides_W02_Variables.pptx
+++ b/Courses/145060/units/unit-01-sequence-data-output/04-slides/exports/MCCTC_145060_Slides_W02_Variables.pptx
@@ -28,24 +28,12 @@
       <p:regular r:id="rId201314"/>
     </p:embeddedFont>
     <p:embeddedFont>
-      <p:font typeface="Orbitron"/>
+      <p:font typeface="Roboto Condensed Bold"/>
       <p:regular r:id="rId201315"/>
     </p:embeddedFont>
     <p:embeddedFont>
-      <p:font typeface="Orbitron Black"/>
+      <p:font typeface="Roboto Condensed"/>
       <p:regular r:id="rId201316"/>
-    </p:embeddedFont>
-    <p:embeddedFont>
-      <p:font typeface="Roboto Condensed Black"/>
-      <p:regular r:id="rId201317"/>
-    </p:embeddedFont>
-    <p:embeddedFont>
-      <p:font typeface="Roboto Condensed Bold"/>
-      <p:regular r:id="rId201318"/>
-    </p:embeddedFont>
-    <p:embeddedFont>
-      <p:font typeface="Roboto Condensed"/>
-      <p:regular r:id="rId201319"/>
     </p:embeddedFont>
   </p:embeddedFontLst>
   <p:defaultTextStyle>
@@ -1066,7 +1054,7 @@
           <a:p>
             <a:r>
               <a:rPr lang="en-US" dirty="0"/>
-              <a:t>In algebra this is false for every number there is. In Python it is an instruction. Take whatever count is currently tied to, add one, and tie count to the new result. Read it with the word gets and it stops being strange. Count gets count plus one. You will write this line hundreds of times before January.</a:t>
+              <a:t>In algebra this is false for every number there is. In Python it is an instruction. Take whatever count is currently tied to, add one, and tie count to the new result. Read it with the word gets and it stops being strange. Count gets count plus one. You will write this line hundreds of times before the semester ends.</a:t>
             </a:r>
             <a:endParaRPr lang="en-US" dirty="0"/>
           </a:p>
@@ -1973,7 +1961,7 @@
         </p:nvSpPr>
         <p:spPr>
           <a:xfrm>
-            <a:off x="5233360" y="755848"/>
+            <a:off x="5233360" y="1931194"/>
             <a:ext cx="6296860" cy="1181298"/>
           </a:xfrm>
           <a:prstGeom prst="rect">
@@ -2009,138 +1997,16 @@
           </a:p>
         </p:txBody>
       </p:sp>
-      <p:pic>
-        <p:nvPicPr>
-          <p:cNvPr id="4" name="Image 1" descr="preencoded.png">    </p:cNvPr>
-          <p:cNvPicPr>
-            <a:picLocks noChangeAspect="1"/>
-          </p:cNvPicPr>
-          <p:nvPr/>
-        </p:nvPicPr>
-        <p:blipFill>
-          <a:blip r:embed="rId2">
-            <a:extLst>
-              <a:ext uri="{96DAC541-7B7A-43D3-8B79-37D633B846F1}">
-                <asvg:svgBlip xmlns:asvg="http://schemas.microsoft.com/office/drawing/2016/SVG/main" r:embed="rId3"/>
-              </a:ext>
-            </a:extLst>
-          </a:blip>
-          <a:stretch>
-            <a:fillRect/>
-          </a:stretch>
-        </p:blipFill>
-        <p:spPr>
-          <a:xfrm>
-            <a:off x="5233360" y="2220615"/>
-            <a:ext cx="6296860" cy="724098"/>
-          </a:xfrm>
-          <a:prstGeom prst="rect">
-            <a:avLst/>
-          </a:prstGeom>
-        </p:spPr>
-      </p:pic>
-      <p:sp>
-        <p:nvSpPr>
-          <p:cNvPr id="5" name="Text 1"/>
+      <p:sp>
+        <p:nvSpPr>
+          <p:cNvPr id="4" name="Text 1"/>
           <p:cNvSpPr/>
           <p:nvPr/>
         </p:nvSpPr>
         <p:spPr>
           <a:xfrm>
-            <a:off x="5549364" y="2435027"/>
-            <a:ext cx="5766449" cy="295275"/>
-          </a:xfrm>
-          <a:prstGeom prst="rect">
-            <a:avLst/>
-          </a:prstGeom>
-          <a:noFill/>
-          <a:ln/>
-        </p:spPr>
-        <p:txBody>
-          <a:bodyPr wrap="none" lIns="0" tIns="0" rIns="0" bIns="0" rtlCol="0" anchor="t"/>
-          <a:lstStyle/>
-          <a:p>
-            <a:pPr algn="l" indent="0" marL="0">
-              <a:lnSpc>
-                <a:spcPct val="104000"/>
-              </a:lnSpc>
-              <a:buNone/>
-            </a:pPr>
-            <a:r>
-              <a:rPr lang="en-US" sz="1850" b="1" dirty="0">
-                <a:solidFill>
-                  <a:srgbClr val="1C1C1C"/>
-                </a:solidFill>
-                <a:highlight>
-                  <a:srgbClr val="F2F2F2"/>
-                </a:highlight>
-                <a:latin typeface="Consolas" pitchFamily="34" charset="0"/>
-                <a:ea typeface="Consolas" pitchFamily="34" charset="-122"/>
-                <a:cs typeface="Consolas" pitchFamily="34" charset="-120"/>
-              </a:rPr>
-              <a:t>x</a:t>
-            </a:r>
-            <a:pPr algn="l" indent="0" marL="0">
-              <a:lnSpc>
-                <a:spcPct val="104000"/>
-              </a:lnSpc>
-              <a:buNone/>
-            </a:pPr>
-            <a:r>
-              <a:rPr lang="en-US" sz="1850" b="1" dirty="0">
-                <a:solidFill>
-                  <a:srgbClr val="1C1C1C"/>
-                </a:solidFill>
-                <a:latin typeface="Orbitron Bold" pitchFamily="34" charset="0"/>
-                <a:ea typeface="Orbitron Bold" pitchFamily="34" charset="-122"/>
-                <a:cs typeface="Orbitron Bold" pitchFamily="34" charset="-120"/>
-              </a:rPr>
-              <a:t> is legal and worth nothing</a:t>
-            </a:r>
-            <a:endParaRPr lang="en-US" sz="1850" dirty="0"/>
-          </a:p>
-        </p:txBody>
-      </p:sp>
-      <p:pic>
-        <p:nvPicPr>
-          <p:cNvPr id="6" name="Image 2" descr="preencoded.png">    </p:cNvPr>
-          <p:cNvPicPr>
-            <a:picLocks noChangeAspect="1"/>
-          </p:cNvPicPr>
-          <p:nvPr/>
-        </p:nvPicPr>
-        <p:blipFill>
-          <a:blip r:embed="rId4">
-            <a:extLst>
-              <a:ext uri="{96DAC541-7B7A-43D3-8B79-37D633B846F1}">
-                <asvg:svgBlip xmlns:asvg="http://schemas.microsoft.com/office/drawing/2016/SVG/main" r:embed="rId5"/>
-              </a:ext>
-            </a:extLst>
-          </a:blip>
-          <a:stretch>
-            <a:fillRect/>
-          </a:stretch>
-        </p:blipFill>
-        <p:spPr>
-          <a:xfrm>
-            <a:off x="5233360" y="3133725"/>
-            <a:ext cx="6296860" cy="1019373"/>
-          </a:xfrm>
-          <a:prstGeom prst="rect">
-            <a:avLst/>
-          </a:prstGeom>
-        </p:spPr>
-      </p:pic>
-      <p:sp>
-        <p:nvSpPr>
-          <p:cNvPr id="7" name="Text 2"/>
-          <p:cNvSpPr/>
-          <p:nvPr/>
-        </p:nvSpPr>
-        <p:spPr>
-          <a:xfrm>
-            <a:off x="5549364" y="3348137"/>
-            <a:ext cx="5766449" cy="590550"/>
+            <a:off x="5233360" y="3395960"/>
+            <a:ext cx="6296860" cy="1407914"/>
           </a:xfrm>
           <a:prstGeom prst="rect">
             <a:avLst/>
@@ -2154,87 +2020,101 @@
           </a:bodyPr>
           <a:lstStyle/>
           <a:p>
-            <a:pPr algn="l" indent="0" marL="0">
-              <a:lnSpc>
-                <a:spcPct val="104000"/>
-              </a:lnSpc>
-              <a:buNone/>
-            </a:pPr>
-            <a:r>
-              <a:rPr lang="en-US" sz="1850" b="1" dirty="0">
+            <a:pPr algn="l" marL="294640" indent="-294640">
+              <a:lnSpc>
+                <a:spcPct val="133000"/>
+              </a:lnSpc>
+              <a:buSzPct val="100000"/>
+              <a:buChar char="•"/>
+            </a:pPr>
+            <a:r>
+              <a:rPr lang="en-US" sz="1450" dirty="0">
                 <a:solidFill>
                   <a:srgbClr val="1C1C1C"/>
                 </a:solidFill>
-                <a:highlight>
-                  <a:srgbClr val="F2F2F2"/>
-                </a:highlight>
-                <a:latin typeface="Consolas" pitchFamily="34" charset="0"/>
-                <a:ea typeface="Consolas" pitchFamily="34" charset="-122"/>
-                <a:cs typeface="Consolas" pitchFamily="34" charset="-120"/>
-              </a:rPr>
-              <a:t>hours_worked</a:t>
-            </a:r>
-            <a:pPr algn="l" indent="0" marL="0">
-              <a:lnSpc>
-                <a:spcPct val="104000"/>
-              </a:lnSpc>
-              <a:buNone/>
-            </a:pPr>
-            <a:r>
-              <a:rPr lang="en-US" sz="1850" b="1" dirty="0">
+                <a:latin typeface="Roboto Condensed" pitchFamily="34" charset="0"/>
+                <a:ea typeface="Roboto Condensed" pitchFamily="34" charset="-122"/>
+                <a:cs typeface="Roboto Condensed" pitchFamily="34" charset="-120"/>
+              </a:rPr>
+              <a:t>x is legal and worth nothing</a:t>
+            </a:r>
+            <a:endParaRPr lang="en-US" sz="1450" dirty="0"/>
+          </a:p>
+          <a:p>
+            <a:pPr algn="l" marL="294640" indent="-294640">
+              <a:lnSpc>
+                <a:spcPct val="133000"/>
+              </a:lnSpc>
+              <a:buSzPct val="100000"/>
+              <a:buChar char="•"/>
+            </a:pPr>
+            <a:r>
+              <a:rPr lang="en-US" sz="1450" dirty="0">
                 <a:solidFill>
                   <a:srgbClr val="1C1C1C"/>
                 </a:solidFill>
-                <a:latin typeface="Orbitron Bold" pitchFamily="34" charset="0"/>
-                <a:ea typeface="Orbitron Bold" pitchFamily="34" charset="-122"/>
-                <a:cs typeface="Orbitron Bold" pitchFamily="34" charset="-120"/>
-              </a:rPr>
-              <a:t> tells the next person what it holds</a:t>
-            </a:r>
-            <a:endParaRPr lang="en-US" sz="1850" dirty="0"/>
-          </a:p>
-        </p:txBody>
-      </p:sp>
-      <p:pic>
-        <p:nvPicPr>
-          <p:cNvPr id="8" name="Image 3" descr="preencoded.png">    </p:cNvPr>
-          <p:cNvPicPr>
-            <a:picLocks noChangeAspect="1"/>
-          </p:cNvPicPr>
-          <p:nvPr/>
-        </p:nvPicPr>
-        <p:blipFill>
-          <a:blip r:embed="rId6">
-            <a:extLst>
-              <a:ext uri="{96DAC541-7B7A-43D3-8B79-37D633B846F1}">
-                <asvg:svgBlip xmlns:asvg="http://schemas.microsoft.com/office/drawing/2016/SVG/main" r:embed="rId7"/>
-              </a:ext>
-            </a:extLst>
-          </a:blip>
-          <a:stretch>
-            <a:fillRect/>
-          </a:stretch>
-        </p:blipFill>
-        <p:spPr>
-          <a:xfrm>
-            <a:off x="5233360" y="4342110"/>
-            <a:ext cx="6296860" cy="724098"/>
-          </a:xfrm>
-          <a:prstGeom prst="rect">
-            <a:avLst/>
-          </a:prstGeom>
-        </p:spPr>
-      </p:pic>
-      <p:sp>
-        <p:nvSpPr>
-          <p:cNvPr id="9" name="Text 3"/>
+                <a:latin typeface="Roboto Condensed" pitchFamily="34" charset="0"/>
+                <a:ea typeface="Roboto Condensed" pitchFamily="34" charset="-122"/>
+                <a:cs typeface="Roboto Condensed" pitchFamily="34" charset="-120"/>
+              </a:rPr>
+              <a:t>hours_worked tells the next person what it holds</a:t>
+            </a:r>
+            <a:endParaRPr lang="en-US" sz="1450" dirty="0"/>
+          </a:p>
+          <a:p>
+            <a:pPr algn="l" marL="294640" indent="-294640">
+              <a:lnSpc>
+                <a:spcPct val="133000"/>
+              </a:lnSpc>
+              <a:buSzPct val="100000"/>
+              <a:buChar char="•"/>
+            </a:pPr>
+            <a:r>
+              <a:rPr lang="en-US" sz="1450" dirty="0">
+                <a:solidFill>
+                  <a:srgbClr val="1C1C1C"/>
+                </a:solidFill>
+                <a:latin typeface="Roboto Condensed" pitchFamily="34" charset="0"/>
+                <a:ea typeface="Roboto Condensed" pitchFamily="34" charset="-122"/>
+                <a:cs typeface="Roboto Condensed" pitchFamily="34" charset="-120"/>
+              </a:rPr>
+              <a:t>The next person is you in three weeks</a:t>
+            </a:r>
+            <a:endParaRPr lang="en-US" sz="1450" dirty="0"/>
+          </a:p>
+          <a:p>
+            <a:pPr algn="l" marL="294640" indent="-294640">
+              <a:lnSpc>
+                <a:spcPct val="133000"/>
+              </a:lnSpc>
+              <a:buSzPct val="100000"/>
+              <a:buChar char="•"/>
+            </a:pPr>
+            <a:r>
+              <a:rPr lang="en-US" sz="1450" dirty="0">
+                <a:solidFill>
+                  <a:srgbClr val="1C1C1C"/>
+                </a:solidFill>
+                <a:latin typeface="Roboto Condensed" pitchFamily="34" charset="0"/>
+                <a:ea typeface="Roboto Condensed" pitchFamily="34" charset="-122"/>
+                <a:cs typeface="Roboto Condensed" pitchFamily="34" charset="-120"/>
+              </a:rPr>
+              <a:t>Lowercase words joined by underscores</a:t>
+            </a:r>
+            <a:endParaRPr lang="en-US" sz="1450" dirty="0"/>
+          </a:p>
+        </p:txBody>
+      </p:sp>
+      <p:sp>
+        <p:nvSpPr>
+          <p:cNvPr id="5" name="Text 2"/>
           <p:cNvSpPr/>
           <p:nvPr/>
         </p:nvSpPr>
         <p:spPr>
           <a:xfrm>
-            <a:off x="5549364" y="4556522"/>
-            <a:ext cx="5766449" cy="295275"/>
+            <a:off x="4704141" y="6457255"/>
+            <a:ext cx="3640642" cy="158750"/>
           </a:xfrm>
           <a:prstGeom prst="rect">
             <a:avLst/>
@@ -2243,121 +2123,7 @@
           <a:ln/>
         </p:spPr>
         <p:txBody>
-          <a:bodyPr wrap="none" lIns="0" tIns="0" rIns="0" bIns="0" rtlCol="0" anchor="t"/>
-          <a:lstStyle/>
-          <a:p>
-            <a:pPr algn="l" indent="0" marL="0">
-              <a:lnSpc>
-                <a:spcPct val="104000"/>
-              </a:lnSpc>
-              <a:buNone/>
-            </a:pPr>
-            <a:r>
-              <a:rPr lang="en-US" sz="1850" b="1" dirty="0">
-                <a:solidFill>
-                  <a:srgbClr val="1C1C1C"/>
-                </a:solidFill>
-                <a:latin typeface="Orbitron Bold" pitchFamily="34" charset="0"/>
-                <a:ea typeface="Orbitron Bold" pitchFamily="34" charset="-122"/>
-                <a:cs typeface="Orbitron Bold" pitchFamily="34" charset="-120"/>
-              </a:rPr>
-              <a:t>The next person is you in three weeks</a:t>
-            </a:r>
-            <a:endParaRPr lang="en-US" sz="1850" dirty="0"/>
-          </a:p>
-        </p:txBody>
-      </p:sp>
-      <p:pic>
-        <p:nvPicPr>
-          <p:cNvPr id="10" name="Image 4" descr="preencoded.png">    </p:cNvPr>
-          <p:cNvPicPr>
-            <a:picLocks noChangeAspect="1"/>
-          </p:cNvPicPr>
-          <p:nvPr/>
-        </p:nvPicPr>
-        <p:blipFill>
-          <a:blip r:embed="rId8">
-            <a:extLst>
-              <a:ext uri="{96DAC541-7B7A-43D3-8B79-37D633B846F1}">
-                <asvg:svgBlip xmlns:asvg="http://schemas.microsoft.com/office/drawing/2016/SVG/main" r:embed="rId9"/>
-              </a:ext>
-            </a:extLst>
-          </a:blip>
-          <a:stretch>
-            <a:fillRect/>
-          </a:stretch>
-        </p:blipFill>
-        <p:spPr>
-          <a:xfrm>
-            <a:off x="5233360" y="5255220"/>
-            <a:ext cx="6296860" cy="724098"/>
-          </a:xfrm>
-          <a:prstGeom prst="rect">
-            <a:avLst/>
-          </a:prstGeom>
-        </p:spPr>
-      </p:pic>
-      <p:sp>
-        <p:nvSpPr>
-          <p:cNvPr id="11" name="Text 4"/>
-          <p:cNvSpPr/>
-          <p:nvPr/>
-        </p:nvSpPr>
-        <p:spPr>
-          <a:xfrm>
-            <a:off x="5549364" y="5469632"/>
-            <a:ext cx="5766449" cy="295275"/>
-          </a:xfrm>
-          <a:prstGeom prst="rect">
-            <a:avLst/>
-          </a:prstGeom>
-          <a:noFill/>
-          <a:ln/>
-        </p:spPr>
-        <p:txBody>
-          <a:bodyPr wrap="none" lIns="0" tIns="0" rIns="0" bIns="0" rtlCol="0" anchor="t"/>
-          <a:lstStyle/>
-          <a:p>
-            <a:pPr algn="l" indent="0" marL="0">
-              <a:lnSpc>
-                <a:spcPct val="104000"/>
-              </a:lnSpc>
-              <a:buNone/>
-            </a:pPr>
-            <a:r>
-              <a:rPr lang="en-US" sz="1850" b="1" dirty="0">
-                <a:solidFill>
-                  <a:srgbClr val="1C1C1C"/>
-                </a:solidFill>
-                <a:latin typeface="Orbitron Bold" pitchFamily="34" charset="0"/>
-                <a:ea typeface="Orbitron Bold" pitchFamily="34" charset="-122"/>
-                <a:cs typeface="Orbitron Bold" pitchFamily="34" charset="-120"/>
-              </a:rPr>
-              <a:t>Lowercase words joined by underscores</a:t>
-            </a:r>
-            <a:endParaRPr lang="en-US" sz="1850" dirty="0"/>
-          </a:p>
-        </p:txBody>
-      </p:sp>
-      <p:sp>
-        <p:nvSpPr>
-          <p:cNvPr id="12" name="Text 5"/>
-          <p:cNvSpPr/>
-          <p:nvPr/>
-        </p:nvSpPr>
-        <p:spPr>
-          <a:xfrm>
-            <a:off x="4704141" y="6457255"/>
-            <a:ext cx="3640642" cy="158750"/>
-          </a:xfrm>
-          <a:prstGeom prst="rect">
-            <a:avLst/>
-          </a:prstGeom>
-          <a:noFill/>
-          <a:ln/>
-        </p:spPr>
-        <p:txBody>
-          <a:bodyPr wrap="none" lIns="0" tIns="99235" rIns="59541" bIns="0" rtlCol="0" anchor="t"/>
+          <a:bodyPr wrap="none" lIns="99235" tIns="0" rIns="59541" bIns="0" rtlCol="0" anchor="t"/>
           <a:lstStyle/>
           <a:p>
             <a:pPr algn="l" indent="0" marL="0">
@@ -2438,8 +2204,8 @@
         </p:nvSpPr>
         <p:spPr>
           <a:xfrm>
-            <a:off x="661475" y="550565"/>
-            <a:ext cx="6296860" cy="1144389"/>
+            <a:off x="661475" y="1931194"/>
+            <a:ext cx="6296860" cy="1181298"/>
           </a:xfrm>
           <a:prstGeom prst="rect">
             <a:avLst/>
@@ -2460,7 +2226,7 @@
               <a:buNone/>
             </a:pPr>
             <a:r>
-              <a:rPr lang="en-US" sz="3600" b="1" dirty="0">
+              <a:rPr lang="en-US" sz="3700" b="1" dirty="0">
                 <a:solidFill>
                   <a:srgbClr val="111111"/>
                 </a:solidFill>
@@ -2470,7 +2236,7 @@
               </a:rPr>
               <a:t>What you are about to build</a:t>
             </a:r>
-            <a:endParaRPr lang="en-US" sz="3600" dirty="0"/>
+            <a:endParaRPr lang="en-US" sz="3700" dirty="0"/>
           </a:p>
         </p:txBody>
       </p:sp>
@@ -2482,70 +2248,8 @@
         </p:nvSpPr>
         <p:spPr>
           <a:xfrm>
-            <a:off x="661475" y="1960959"/>
-            <a:ext cx="366207" cy="228798"/>
-          </a:xfrm>
-          <a:prstGeom prst="rect">
-            <a:avLst/>
-          </a:prstGeom>
-          <a:noFill/>
-          <a:ln/>
-        </p:spPr>
-        <p:txBody>
-          <a:bodyPr wrap="none" lIns="0" tIns="0" rIns="0" bIns="0" rtlCol="0" anchor="ctr"/>
-          <a:lstStyle/>
-          <a:p>
-            <a:pPr algn="l" indent="0" marL="0">
-              <a:lnSpc>
-                <a:spcPct val="100000"/>
-              </a:lnSpc>
-              <a:buNone/>
-            </a:pPr>
-            <a:r>
-              <a:rPr lang="en-US" sz="1400" dirty="0">
-                <a:solidFill>
-                  <a:srgbClr val="1C1C1C"/>
-                </a:solidFill>
-                <a:latin typeface="Orbitron" pitchFamily="34" charset="0"/>
-                <a:ea typeface="Orbitron" pitchFamily="34" charset="-122"/>
-                <a:cs typeface="Orbitron" pitchFamily="34" charset="-120"/>
-              </a:rPr>
-              <a:t>01</a:t>
-            </a:r>
-            <a:endParaRPr lang="en-US" sz="1400" dirty="0"/>
-          </a:p>
-        </p:txBody>
-      </p:sp>
-      <p:sp>
-        <p:nvSpPr>
-          <p:cNvPr id="5" name="Shape 2"/>
-          <p:cNvSpPr/>
-          <p:nvPr/>
-        </p:nvSpPr>
-        <p:spPr>
-          <a:xfrm>
-            <a:off x="661475" y="2246709"/>
-            <a:ext cx="6296860" cy="25400"/>
-          </a:xfrm>
-          <a:prstGeom prst="rect">
-            <a:avLst/>
-          </a:prstGeom>
-          <a:solidFill>
-            <a:srgbClr val="57A1EB"/>
-          </a:solidFill>
-          <a:ln/>
-        </p:spPr>
-      </p:sp>
-      <p:sp>
-        <p:nvSpPr>
-          <p:cNvPr id="6" name="Text 3"/>
-          <p:cNvSpPr/>
-          <p:nvPr/>
-        </p:nvSpPr>
-        <p:spPr>
-          <a:xfrm>
-            <a:off x="661475" y="2388989"/>
-            <a:ext cx="6296860" cy="572095"/>
+            <a:off x="661475" y="3395960"/>
+            <a:ext cx="6296860" cy="1407914"/>
           </a:xfrm>
           <a:prstGeom prst="rect">
             <a:avLst/>
@@ -2559,37 +2263,101 @@
           </a:bodyPr>
           <a:lstStyle/>
           <a:p>
-            <a:pPr algn="l" indent="0" marL="0">
-              <a:lnSpc>
-                <a:spcPct val="104000"/>
-              </a:lnSpc>
-              <a:buNone/>
-            </a:pPr>
-            <a:r>
-              <a:rPr lang="en-US" sz="1800" b="1" dirty="0">
+            <a:pPr algn="l" marL="294640" indent="-294640">
+              <a:lnSpc>
+                <a:spcPct val="133000"/>
+              </a:lnSpc>
+              <a:buSzPct val="100000"/>
+              <a:buChar char="•"/>
+            </a:pPr>
+            <a:r>
+              <a:rPr lang="en-US" sz="1450" dirty="0">
                 <a:solidFill>
                   <a:srgbClr val="1C1C1C"/>
                 </a:solidFill>
-                <a:latin typeface="Orbitron Bold" pitchFamily="34" charset="0"/>
-                <a:ea typeface="Orbitron Bold" pitchFamily="34" charset="-122"/>
-                <a:cs typeface="Orbitron Bold" pitchFamily="34" charset="-120"/>
+                <a:latin typeface="Roboto Condensed" pitchFamily="34" charset="0"/>
+                <a:ea typeface="Roboto Condensed" pitchFamily="34" charset="-122"/>
+                <a:cs typeface="Roboto Condensed" pitchFamily="34" charset="-120"/>
               </a:rPr>
               <a:t>A calculator for something you actually want to know</a:t>
             </a:r>
-            <a:endParaRPr lang="en-US" sz="1800" dirty="0"/>
-          </a:p>
-        </p:txBody>
-      </p:sp>
-      <p:sp>
-        <p:nvSpPr>
-          <p:cNvPr id="7" name="Text 4"/>
+            <a:endParaRPr lang="en-US" sz="1450" dirty="0"/>
+          </a:p>
+          <a:p>
+            <a:pPr algn="l" marL="294640" indent="-294640">
+              <a:lnSpc>
+                <a:spcPct val="133000"/>
+              </a:lnSpc>
+              <a:buSzPct val="100000"/>
+              <a:buChar char="•"/>
+            </a:pPr>
+            <a:r>
+              <a:rPr lang="en-US" sz="1450" dirty="0">
+                <a:solidFill>
+                  <a:srgbClr val="1C1C1C"/>
+                </a:solidFill>
+                <a:latin typeface="Roboto Condensed" pitchFamily="34" charset="0"/>
+                <a:ea typeface="Roboto Condensed" pitchFamily="34" charset="-122"/>
+                <a:cs typeface="Roboto Condensed" pitchFamily="34" charset="-120"/>
+              </a:rPr>
+              <a:t>Four variables minimum, readable names</a:t>
+            </a:r>
+            <a:endParaRPr lang="en-US" sz="1450" dirty="0"/>
+          </a:p>
+          <a:p>
+            <a:pPr algn="l" marL="294640" indent="-294640">
+              <a:lnSpc>
+                <a:spcPct val="133000"/>
+              </a:lnSpc>
+              <a:buSzPct val="100000"/>
+              <a:buChar char="•"/>
+            </a:pPr>
+            <a:r>
+              <a:rPr lang="en-US" sz="1450" dirty="0">
+                <a:solidFill>
+                  <a:srgbClr val="1C1C1C"/>
+                </a:solidFill>
+                <a:latin typeface="Roboto Condensed" pitchFamily="34" charset="0"/>
+                <a:ea typeface="Roboto Condensed" pitchFamily="34" charset="-122"/>
+                <a:cs typeface="Roboto Condensed" pitchFamily="34" charset="-120"/>
+              </a:rPr>
+              <a:t>Two values calculated from other values</a:t>
+            </a:r>
+            <a:endParaRPr lang="en-US" sz="1450" dirty="0"/>
+          </a:p>
+          <a:p>
+            <a:pPr algn="l" marL="294640" indent="-294640">
+              <a:lnSpc>
+                <a:spcPct val="133000"/>
+              </a:lnSpc>
+              <a:buSzPct val="100000"/>
+              <a:buChar char="•"/>
+            </a:pPr>
+            <a:r>
+              <a:rPr lang="en-US" sz="1450" dirty="0">
+                <a:solidFill>
+                  <a:srgbClr val="1C1C1C"/>
+                </a:solidFill>
+                <a:latin typeface="Roboto Condensed" pitchFamily="34" charset="0"/>
+                <a:ea typeface="Roboto Condensed" pitchFamily="34" charset="-122"/>
+                <a:cs typeface="Roboto Condensed" pitchFamily="34" charset="-120"/>
+              </a:rPr>
+              <a:t>Then lab U1-01, steps one through six</a:t>
+            </a:r>
+            <a:endParaRPr lang="en-US" sz="1450" dirty="0"/>
+          </a:p>
+        </p:txBody>
+      </p:sp>
+      <p:sp>
+        <p:nvSpPr>
+          <p:cNvPr id="5" name="Text 2"/>
           <p:cNvSpPr/>
           <p:nvPr/>
         </p:nvSpPr>
         <p:spPr>
           <a:xfrm>
-            <a:off x="661475" y="3275707"/>
-            <a:ext cx="366207" cy="228798"/>
+            <a:off x="132255" y="6457255"/>
+            <a:ext cx="3640642" cy="158750"/>
           </a:xfrm>
           <a:prstGeom prst="rect">
             <a:avLst/>
@@ -2598,319 +2366,7 @@
           <a:ln/>
         </p:spPr>
         <p:txBody>
-          <a:bodyPr wrap="none" lIns="0" tIns="0" rIns="0" bIns="0" rtlCol="0" anchor="ctr"/>
-          <a:lstStyle/>
-          <a:p>
-            <a:pPr algn="l" indent="0" marL="0">
-              <a:lnSpc>
-                <a:spcPct val="100000"/>
-              </a:lnSpc>
-              <a:buNone/>
-            </a:pPr>
-            <a:r>
-              <a:rPr lang="en-US" sz="1400" dirty="0">
-                <a:solidFill>
-                  <a:srgbClr val="1C1C1C"/>
-                </a:solidFill>
-                <a:latin typeface="Orbitron" pitchFamily="34" charset="0"/>
-                <a:ea typeface="Orbitron" pitchFamily="34" charset="-122"/>
-                <a:cs typeface="Orbitron" pitchFamily="34" charset="-120"/>
-              </a:rPr>
-              <a:t>02</a:t>
-            </a:r>
-            <a:endParaRPr lang="en-US" sz="1400" dirty="0"/>
-          </a:p>
-        </p:txBody>
-      </p:sp>
-      <p:sp>
-        <p:nvSpPr>
-          <p:cNvPr id="8" name="Shape 5"/>
-          <p:cNvSpPr/>
-          <p:nvPr/>
-        </p:nvSpPr>
-        <p:spPr>
-          <a:xfrm>
-            <a:off x="661475" y="3561457"/>
-            <a:ext cx="6296860" cy="25400"/>
-          </a:xfrm>
-          <a:prstGeom prst="rect">
-            <a:avLst/>
-          </a:prstGeom>
-          <a:solidFill>
-            <a:srgbClr val="57A1EB"/>
-          </a:solidFill>
-          <a:ln/>
-        </p:spPr>
-      </p:sp>
-      <p:sp>
-        <p:nvSpPr>
-          <p:cNvPr id="9" name="Text 6"/>
-          <p:cNvSpPr/>
-          <p:nvPr/>
-        </p:nvSpPr>
-        <p:spPr>
-          <a:xfrm>
-            <a:off x="661475" y="3703737"/>
-            <a:ext cx="6296860" cy="286048"/>
-          </a:xfrm>
-          <a:prstGeom prst="rect">
-            <a:avLst/>
-          </a:prstGeom>
-          <a:noFill/>
-          <a:ln/>
-        </p:spPr>
-        <p:txBody>
-          <a:bodyPr wrap="none" lIns="0" tIns="0" rIns="0" bIns="0" rtlCol="0" anchor="t"/>
-          <a:lstStyle/>
-          <a:p>
-            <a:pPr algn="l" indent="0" marL="0">
-              <a:lnSpc>
-                <a:spcPct val="104000"/>
-              </a:lnSpc>
-              <a:buNone/>
-            </a:pPr>
-            <a:r>
-              <a:rPr lang="en-US" sz="1800" b="1" dirty="0">
-                <a:solidFill>
-                  <a:srgbClr val="1C1C1C"/>
-                </a:solidFill>
-                <a:latin typeface="Orbitron Bold" pitchFamily="34" charset="0"/>
-                <a:ea typeface="Orbitron Bold" pitchFamily="34" charset="-122"/>
-                <a:cs typeface="Orbitron Bold" pitchFamily="34" charset="-120"/>
-              </a:rPr>
-              <a:t>Four variables minimum, readable names</a:t>
-            </a:r>
-            <a:endParaRPr lang="en-US" sz="1800" dirty="0"/>
-          </a:p>
-        </p:txBody>
-      </p:sp>
-      <p:sp>
-        <p:nvSpPr>
-          <p:cNvPr id="10" name="Text 7"/>
-          <p:cNvSpPr/>
-          <p:nvPr/>
-        </p:nvSpPr>
-        <p:spPr>
-          <a:xfrm>
-            <a:off x="661475" y="4304407"/>
-            <a:ext cx="366207" cy="228798"/>
-          </a:xfrm>
-          <a:prstGeom prst="rect">
-            <a:avLst/>
-          </a:prstGeom>
-          <a:noFill/>
-          <a:ln/>
-        </p:spPr>
-        <p:txBody>
-          <a:bodyPr wrap="none" lIns="0" tIns="0" rIns="0" bIns="0" rtlCol="0" anchor="ctr"/>
-          <a:lstStyle/>
-          <a:p>
-            <a:pPr algn="l" indent="0" marL="0">
-              <a:lnSpc>
-                <a:spcPct val="100000"/>
-              </a:lnSpc>
-              <a:buNone/>
-            </a:pPr>
-            <a:r>
-              <a:rPr lang="en-US" sz="1400" dirty="0">
-                <a:solidFill>
-                  <a:srgbClr val="1C1C1C"/>
-                </a:solidFill>
-                <a:latin typeface="Orbitron" pitchFamily="34" charset="0"/>
-                <a:ea typeface="Orbitron" pitchFamily="34" charset="-122"/>
-                <a:cs typeface="Orbitron" pitchFamily="34" charset="-120"/>
-              </a:rPr>
-              <a:t>03</a:t>
-            </a:r>
-            <a:endParaRPr lang="en-US" sz="1400" dirty="0"/>
-          </a:p>
-        </p:txBody>
-      </p:sp>
-      <p:sp>
-        <p:nvSpPr>
-          <p:cNvPr id="11" name="Shape 8"/>
-          <p:cNvSpPr/>
-          <p:nvPr/>
-        </p:nvSpPr>
-        <p:spPr>
-          <a:xfrm>
-            <a:off x="661475" y="4590157"/>
-            <a:ext cx="6296860" cy="25400"/>
-          </a:xfrm>
-          <a:prstGeom prst="rect">
-            <a:avLst/>
-          </a:prstGeom>
-          <a:solidFill>
-            <a:srgbClr val="57A1EB"/>
-          </a:solidFill>
-          <a:ln/>
-        </p:spPr>
-      </p:sp>
-      <p:sp>
-        <p:nvSpPr>
-          <p:cNvPr id="12" name="Text 9"/>
-          <p:cNvSpPr/>
-          <p:nvPr/>
-        </p:nvSpPr>
-        <p:spPr>
-          <a:xfrm>
-            <a:off x="661475" y="4732437"/>
-            <a:ext cx="6296860" cy="286048"/>
-          </a:xfrm>
-          <a:prstGeom prst="rect">
-            <a:avLst/>
-          </a:prstGeom>
-          <a:noFill/>
-          <a:ln/>
-        </p:spPr>
-        <p:txBody>
-          <a:bodyPr wrap="none" lIns="0" tIns="0" rIns="0" bIns="0" rtlCol="0" anchor="t"/>
-          <a:lstStyle/>
-          <a:p>
-            <a:pPr algn="l" indent="0" marL="0">
-              <a:lnSpc>
-                <a:spcPct val="104000"/>
-              </a:lnSpc>
-              <a:buNone/>
-            </a:pPr>
-            <a:r>
-              <a:rPr lang="en-US" sz="1800" b="1" dirty="0">
-                <a:solidFill>
-                  <a:srgbClr val="1C1C1C"/>
-                </a:solidFill>
-                <a:latin typeface="Orbitron Bold" pitchFamily="34" charset="0"/>
-                <a:ea typeface="Orbitron Bold" pitchFamily="34" charset="-122"/>
-                <a:cs typeface="Orbitron Bold" pitchFamily="34" charset="-120"/>
-              </a:rPr>
-              <a:t>Two values calculated from other values</a:t>
-            </a:r>
-            <a:endParaRPr lang="en-US" sz="1800" dirty="0"/>
-          </a:p>
-        </p:txBody>
-      </p:sp>
-      <p:sp>
-        <p:nvSpPr>
-          <p:cNvPr id="13" name="Text 10"/>
-          <p:cNvSpPr/>
-          <p:nvPr/>
-        </p:nvSpPr>
-        <p:spPr>
-          <a:xfrm>
-            <a:off x="661475" y="5333107"/>
-            <a:ext cx="366207" cy="228798"/>
-          </a:xfrm>
-          <a:prstGeom prst="rect">
-            <a:avLst/>
-          </a:prstGeom>
-          <a:noFill/>
-          <a:ln/>
-        </p:spPr>
-        <p:txBody>
-          <a:bodyPr wrap="none" lIns="0" tIns="0" rIns="0" bIns="0" rtlCol="0" anchor="ctr"/>
-          <a:lstStyle/>
-          <a:p>
-            <a:pPr algn="l" indent="0" marL="0">
-              <a:lnSpc>
-                <a:spcPct val="100000"/>
-              </a:lnSpc>
-              <a:buNone/>
-            </a:pPr>
-            <a:r>
-              <a:rPr lang="en-US" sz="1400" dirty="0">
-                <a:solidFill>
-                  <a:srgbClr val="1C1C1C"/>
-                </a:solidFill>
-                <a:latin typeface="Orbitron" pitchFamily="34" charset="0"/>
-                <a:ea typeface="Orbitron" pitchFamily="34" charset="-122"/>
-                <a:cs typeface="Orbitron" pitchFamily="34" charset="-120"/>
-              </a:rPr>
-              <a:t>04</a:t>
-            </a:r>
-            <a:endParaRPr lang="en-US" sz="1400" dirty="0"/>
-          </a:p>
-        </p:txBody>
-      </p:sp>
-      <p:sp>
-        <p:nvSpPr>
-          <p:cNvPr id="14" name="Shape 11"/>
-          <p:cNvSpPr/>
-          <p:nvPr/>
-        </p:nvSpPr>
-        <p:spPr>
-          <a:xfrm>
-            <a:off x="661475" y="5618857"/>
-            <a:ext cx="6296860" cy="25400"/>
-          </a:xfrm>
-          <a:prstGeom prst="rect">
-            <a:avLst/>
-          </a:prstGeom>
-          <a:solidFill>
-            <a:srgbClr val="57A1EB"/>
-          </a:solidFill>
-          <a:ln/>
-        </p:spPr>
-      </p:sp>
-      <p:sp>
-        <p:nvSpPr>
-          <p:cNvPr id="15" name="Text 12"/>
-          <p:cNvSpPr/>
-          <p:nvPr/>
-        </p:nvSpPr>
-        <p:spPr>
-          <a:xfrm>
-            <a:off x="661475" y="5761137"/>
-            <a:ext cx="6296860" cy="286048"/>
-          </a:xfrm>
-          <a:prstGeom prst="rect">
-            <a:avLst/>
-          </a:prstGeom>
-          <a:noFill/>
-          <a:ln/>
-        </p:spPr>
-        <p:txBody>
-          <a:bodyPr wrap="none" lIns="0" tIns="0" rIns="0" bIns="0" rtlCol="0" anchor="t"/>
-          <a:lstStyle/>
-          <a:p>
-            <a:pPr algn="l" indent="0" marL="0">
-              <a:lnSpc>
-                <a:spcPct val="104000"/>
-              </a:lnSpc>
-              <a:buNone/>
-            </a:pPr>
-            <a:r>
-              <a:rPr lang="en-US" sz="1800" b="1" dirty="0">
-                <a:solidFill>
-                  <a:srgbClr val="1C1C1C"/>
-                </a:solidFill>
-                <a:latin typeface="Orbitron Bold" pitchFamily="34" charset="0"/>
-                <a:ea typeface="Orbitron Bold" pitchFamily="34" charset="-122"/>
-                <a:cs typeface="Orbitron Bold" pitchFamily="34" charset="-120"/>
-              </a:rPr>
-              <a:t>Then lab U1-01, steps one through six</a:t>
-            </a:r>
-            <a:endParaRPr lang="en-US" sz="1800" dirty="0"/>
-          </a:p>
-        </p:txBody>
-      </p:sp>
-      <p:sp>
-        <p:nvSpPr>
-          <p:cNvPr id="16" name="Text 13"/>
-          <p:cNvSpPr/>
-          <p:nvPr/>
-        </p:nvSpPr>
-        <p:spPr>
-          <a:xfrm>
-            <a:off x="132255" y="6457255"/>
-            <a:ext cx="3640642" cy="158750"/>
-          </a:xfrm>
-          <a:prstGeom prst="rect">
-            <a:avLst/>
-          </a:prstGeom>
-          <a:noFill/>
-          <a:ln/>
-        </p:spPr>
-        <p:txBody>
-          <a:bodyPr wrap="none" lIns="0" tIns="99235" rIns="59541" bIns="0" rtlCol="0" anchor="t"/>
+          <a:bodyPr wrap="none" lIns="99235" tIns="0" rIns="59541" bIns="0" rtlCol="0" anchor="t"/>
           <a:lstStyle/>
           <a:p>
             <a:pPr algn="l" indent="0" marL="0">
@@ -2991,7 +2447,7 @@
         </p:nvSpPr>
         <p:spPr>
           <a:xfrm>
-            <a:off x="661475" y="627063"/>
+            <a:off x="661475" y="1635919"/>
             <a:ext cx="6296860" cy="1771948"/>
           </a:xfrm>
           <a:prstGeom prst="rect">
@@ -3027,46 +2483,16 @@
           </a:p>
         </p:txBody>
       </p:sp>
-      <p:pic>
-        <p:nvPicPr>
-          <p:cNvPr id="4" name="Image 1" descr="preencoded.png">    </p:cNvPr>
-          <p:cNvPicPr>
-            <a:picLocks noChangeAspect="1"/>
-          </p:cNvPicPr>
-          <p:nvPr/>
-        </p:nvPicPr>
-        <p:blipFill>
-          <a:blip r:embed="rId2">
-            <a:extLst>
-              <a:ext uri="{96DAC541-7B7A-43D3-8B79-37D633B846F1}">
-                <asvg:svgBlip xmlns:asvg="http://schemas.microsoft.com/office/drawing/2016/SVG/main" r:embed="rId3"/>
-              </a:ext>
-            </a:extLst>
-          </a:blip>
-          <a:stretch>
-            <a:fillRect/>
-          </a:stretch>
-        </p:blipFill>
-        <p:spPr>
-          <a:xfrm>
-            <a:off x="732315" y="2688332"/>
-            <a:ext cx="283461" cy="283468"/>
-          </a:xfrm>
-          <a:prstGeom prst="rect">
-            <a:avLst/>
-          </a:prstGeom>
-        </p:spPr>
-      </p:pic>
-      <p:sp>
-        <p:nvSpPr>
-          <p:cNvPr id="5" name="Text 1"/>
+      <p:sp>
+        <p:nvSpPr>
+          <p:cNvPr id="4" name="Text 1"/>
           <p:cNvSpPr/>
           <p:nvPr/>
         </p:nvSpPr>
         <p:spPr>
           <a:xfrm>
-            <a:off x="1275723" y="2682478"/>
-            <a:ext cx="5682612" cy="295275"/>
+            <a:off x="661475" y="3691334"/>
+            <a:ext cx="6296860" cy="1407914"/>
           </a:xfrm>
           <a:prstGeom prst="rect">
             <a:avLst/>
@@ -3075,70 +2501,106 @@
           <a:ln/>
         </p:spPr>
         <p:txBody>
-          <a:bodyPr wrap="none" lIns="0" tIns="0" rIns="0" bIns="0" rtlCol="0" anchor="t"/>
-          <a:lstStyle/>
-          <a:p>
-            <a:pPr algn="l" indent="0" marL="0">
-              <a:lnSpc>
-                <a:spcPct val="104000"/>
-              </a:lnSpc>
-              <a:buNone/>
-            </a:pPr>
-            <a:r>
-              <a:rPr lang="en-US" sz="1850" b="1" dirty="0">
+          <a:bodyPr wrap="square" lIns="0" tIns="0" rIns="0" bIns="0" rtlCol="0" anchor="t">
+            <a:normAutofit/>
+          </a:bodyPr>
+          <a:lstStyle/>
+          <a:p>
+            <a:pPr algn="l" marL="294640" indent="-294640">
+              <a:lnSpc>
+                <a:spcPct val="133000"/>
+              </a:lnSpc>
+              <a:buSzPct val="100000"/>
+              <a:buChar char="•"/>
+            </a:pPr>
+            <a:r>
+              <a:rPr lang="en-US" sz="1450" dirty="0">
                 <a:solidFill>
                   <a:srgbClr val="1C1C1C"/>
                 </a:solidFill>
-                <a:latin typeface="Orbitron Bold" pitchFamily="34" charset="0"/>
-                <a:ea typeface="Orbitron Bold" pitchFamily="34" charset="-122"/>
-                <a:cs typeface="Orbitron Bold" pitchFamily="34" charset="-120"/>
+                <a:latin typeface="Roboto Condensed" pitchFamily="34" charset="0"/>
+                <a:ea typeface="Roboto Condensed" pitchFamily="34" charset="-122"/>
+                <a:cs typeface="Roboto Condensed" pitchFamily="34" charset="-120"/>
               </a:rPr>
               <a:t>Your event card prints one event</a:t>
             </a:r>
-            <a:endParaRPr lang="en-US" sz="1850" dirty="0"/>
-          </a:p>
-        </p:txBody>
-      </p:sp>
-      <p:pic>
-        <p:nvPicPr>
-          <p:cNvPr id="6" name="Image 2" descr="preencoded.png">    </p:cNvPr>
-          <p:cNvPicPr>
-            <a:picLocks noChangeAspect="1"/>
-          </p:cNvPicPr>
-          <p:nvPr/>
-        </p:nvPicPr>
-        <p:blipFill>
-          <a:blip r:embed="rId4">
-            <a:extLst>
-              <a:ext uri="{96DAC541-7B7A-43D3-8B79-37D633B846F1}">
-                <asvg:svgBlip xmlns:asvg="http://schemas.microsoft.com/office/drawing/2016/SVG/main" r:embed="rId5"/>
-              </a:ext>
-            </a:extLst>
-          </a:blip>
-          <a:stretch>
-            <a:fillRect/>
-          </a:stretch>
-        </p:blipFill>
-        <p:spPr>
-          <a:xfrm>
-            <a:off x="732315" y="3639245"/>
-            <a:ext cx="283461" cy="283468"/>
-          </a:xfrm>
-          <a:prstGeom prst="rect">
-            <a:avLst/>
-          </a:prstGeom>
-        </p:spPr>
-      </p:pic>
-      <p:sp>
-        <p:nvSpPr>
-          <p:cNvPr id="7" name="Text 2"/>
+            <a:endParaRPr lang="en-US" sz="1450" dirty="0"/>
+          </a:p>
+          <a:p>
+            <a:pPr algn="l" marL="294640" indent="-294640">
+              <a:lnSpc>
+                <a:spcPct val="133000"/>
+              </a:lnSpc>
+              <a:buSzPct val="100000"/>
+              <a:buChar char="•"/>
+            </a:pPr>
+            <a:r>
+              <a:rPr lang="en-US" sz="1450" dirty="0">
+                <a:solidFill>
+                  <a:srgbClr val="1C1C1C"/>
+                </a:solidFill>
+                <a:latin typeface="Roboto Condensed" pitchFamily="34" charset="0"/>
+                <a:ea typeface="Roboto Condensed" pitchFamily="34" charset="-122"/>
+                <a:cs typeface="Roboto Condensed" pitchFamily="34" charset="-120"/>
+              </a:rPr>
+              <a:t>Change the time and you edit the code</a:t>
+            </a:r>
+            <a:endParaRPr lang="en-US" sz="1450" dirty="0"/>
+          </a:p>
+          <a:p>
+            <a:pPr algn="l" marL="294640" indent="-294640">
+              <a:lnSpc>
+                <a:spcPct val="133000"/>
+              </a:lnSpc>
+              <a:buSzPct val="100000"/>
+              <a:buChar char="•"/>
+            </a:pPr>
+            <a:r>
+              <a:rPr lang="en-US" sz="1450" dirty="0">
+                <a:solidFill>
+                  <a:srgbClr val="1C1C1C"/>
+                </a:solidFill>
+                <a:latin typeface="Roboto Condensed" pitchFamily="34" charset="0"/>
+                <a:ea typeface="Roboto Condensed" pitchFamily="34" charset="-122"/>
+                <a:cs typeface="Roboto Condensed" pitchFamily="34" charset="-120"/>
+              </a:rPr>
+              <a:t>Only you can do that</a:t>
+            </a:r>
+            <a:endParaRPr lang="en-US" sz="1450" dirty="0"/>
+          </a:p>
+          <a:p>
+            <a:pPr algn="l" marL="294640" indent="-294640">
+              <a:lnSpc>
+                <a:spcPct val="133000"/>
+              </a:lnSpc>
+              <a:buSzPct val="100000"/>
+              <a:buChar char="•"/>
+            </a:pPr>
+            <a:r>
+              <a:rPr lang="en-US" sz="1450" dirty="0">
+                <a:solidFill>
+                  <a:srgbClr val="1C1C1C"/>
+                </a:solidFill>
+                <a:latin typeface="Roboto Condensed" pitchFamily="34" charset="0"/>
+                <a:ea typeface="Roboto Condensed" pitchFamily="34" charset="-122"/>
+                <a:cs typeface="Roboto Condensed" pitchFamily="34" charset="-120"/>
+              </a:rPr>
+              <a:t>That is a poster, not a program</a:t>
+            </a:r>
+            <a:endParaRPr lang="en-US" sz="1450" dirty="0"/>
+          </a:p>
+        </p:txBody>
+      </p:sp>
+      <p:sp>
+        <p:nvSpPr>
+          <p:cNvPr id="5" name="Text 2"/>
           <p:cNvSpPr/>
           <p:nvPr/>
         </p:nvSpPr>
         <p:spPr>
           <a:xfrm>
-            <a:off x="1275723" y="3633391"/>
-            <a:ext cx="5682612" cy="295275"/>
+            <a:off x="132255" y="6457255"/>
+            <a:ext cx="3640642" cy="158750"/>
           </a:xfrm>
           <a:prstGeom prst="rect">
             <a:avLst/>
@@ -3147,193 +2609,7 @@
           <a:ln/>
         </p:spPr>
         <p:txBody>
-          <a:bodyPr wrap="none" lIns="0" tIns="0" rIns="0" bIns="0" rtlCol="0" anchor="t"/>
-          <a:lstStyle/>
-          <a:p>
-            <a:pPr algn="l" indent="0" marL="0">
-              <a:lnSpc>
-                <a:spcPct val="104000"/>
-              </a:lnSpc>
-              <a:buNone/>
-            </a:pPr>
-            <a:r>
-              <a:rPr lang="en-US" sz="1850" b="1" dirty="0">
-                <a:solidFill>
-                  <a:srgbClr val="1C1C1C"/>
-                </a:solidFill>
-                <a:latin typeface="Orbitron Bold" pitchFamily="34" charset="0"/>
-                <a:ea typeface="Orbitron Bold" pitchFamily="34" charset="-122"/>
-                <a:cs typeface="Orbitron Bold" pitchFamily="34" charset="-120"/>
-              </a:rPr>
-              <a:t>Change the time and you edit the code</a:t>
-            </a:r>
-            <a:endParaRPr lang="en-US" sz="1850" dirty="0"/>
-          </a:p>
-        </p:txBody>
-      </p:sp>
-      <p:pic>
-        <p:nvPicPr>
-          <p:cNvPr id="8" name="Image 3" descr="preencoded.png">    </p:cNvPr>
-          <p:cNvPicPr>
-            <a:picLocks noChangeAspect="1"/>
-          </p:cNvPicPr>
-          <p:nvPr/>
-        </p:nvPicPr>
-        <p:blipFill>
-          <a:blip r:embed="rId6">
-            <a:extLst>
-              <a:ext uri="{96DAC541-7B7A-43D3-8B79-37D633B846F1}">
-                <asvg:svgBlip xmlns:asvg="http://schemas.microsoft.com/office/drawing/2016/SVG/main" r:embed="rId7"/>
-              </a:ext>
-            </a:extLst>
-          </a:blip>
-          <a:stretch>
-            <a:fillRect/>
-          </a:stretch>
-        </p:blipFill>
-        <p:spPr>
-          <a:xfrm>
-            <a:off x="732315" y="4590157"/>
-            <a:ext cx="283461" cy="283468"/>
-          </a:xfrm>
-          <a:prstGeom prst="rect">
-            <a:avLst/>
-          </a:prstGeom>
-        </p:spPr>
-      </p:pic>
-      <p:sp>
-        <p:nvSpPr>
-          <p:cNvPr id="9" name="Text 3"/>
-          <p:cNvSpPr/>
-          <p:nvPr/>
-        </p:nvSpPr>
-        <p:spPr>
-          <a:xfrm>
-            <a:off x="1275723" y="4584303"/>
-            <a:ext cx="5682612" cy="295275"/>
-          </a:xfrm>
-          <a:prstGeom prst="rect">
-            <a:avLst/>
-          </a:prstGeom>
-          <a:noFill/>
-          <a:ln/>
-        </p:spPr>
-        <p:txBody>
-          <a:bodyPr wrap="none" lIns="0" tIns="0" rIns="0" bIns="0" rtlCol="0" anchor="t"/>
-          <a:lstStyle/>
-          <a:p>
-            <a:pPr algn="l" indent="0" marL="0">
-              <a:lnSpc>
-                <a:spcPct val="104000"/>
-              </a:lnSpc>
-              <a:buNone/>
-            </a:pPr>
-            <a:r>
-              <a:rPr lang="en-US" sz="1850" b="1" dirty="0">
-                <a:solidFill>
-                  <a:srgbClr val="1C1C1C"/>
-                </a:solidFill>
-                <a:latin typeface="Orbitron Bold" pitchFamily="34" charset="0"/>
-                <a:ea typeface="Orbitron Bold" pitchFamily="34" charset="-122"/>
-                <a:cs typeface="Orbitron Bold" pitchFamily="34" charset="-120"/>
-              </a:rPr>
-              <a:t>Only you can do that</a:t>
-            </a:r>
-            <a:endParaRPr lang="en-US" sz="1850" dirty="0"/>
-          </a:p>
-        </p:txBody>
-      </p:sp>
-      <p:pic>
-        <p:nvPicPr>
-          <p:cNvPr id="10" name="Image 4" descr="preencoded.png">    </p:cNvPr>
-          <p:cNvPicPr>
-            <a:picLocks noChangeAspect="1"/>
-          </p:cNvPicPr>
-          <p:nvPr/>
-        </p:nvPicPr>
-        <p:blipFill>
-          <a:blip r:embed="rId8">
-            <a:extLst>
-              <a:ext uri="{96DAC541-7B7A-43D3-8B79-37D633B846F1}">
-                <asvg:svgBlip xmlns:asvg="http://schemas.microsoft.com/office/drawing/2016/SVG/main" r:embed="rId9"/>
-              </a:ext>
-            </a:extLst>
-          </a:blip>
-          <a:stretch>
-            <a:fillRect/>
-          </a:stretch>
-        </p:blipFill>
-        <p:spPr>
-          <a:xfrm>
-            <a:off x="732315" y="5541070"/>
-            <a:ext cx="283461" cy="283468"/>
-          </a:xfrm>
-          <a:prstGeom prst="rect">
-            <a:avLst/>
-          </a:prstGeom>
-        </p:spPr>
-      </p:pic>
-      <p:sp>
-        <p:nvSpPr>
-          <p:cNvPr id="11" name="Text 4"/>
-          <p:cNvSpPr/>
-          <p:nvPr/>
-        </p:nvSpPr>
-        <p:spPr>
-          <a:xfrm>
-            <a:off x="1275723" y="5535216"/>
-            <a:ext cx="5682612" cy="295275"/>
-          </a:xfrm>
-          <a:prstGeom prst="rect">
-            <a:avLst/>
-          </a:prstGeom>
-          <a:noFill/>
-          <a:ln/>
-        </p:spPr>
-        <p:txBody>
-          <a:bodyPr wrap="none" lIns="0" tIns="0" rIns="0" bIns="0" rtlCol="0" anchor="t"/>
-          <a:lstStyle/>
-          <a:p>
-            <a:pPr algn="l" indent="0" marL="0">
-              <a:lnSpc>
-                <a:spcPct val="104000"/>
-              </a:lnSpc>
-              <a:buNone/>
-            </a:pPr>
-            <a:r>
-              <a:rPr lang="en-US" sz="1850" b="1" dirty="0">
-                <a:solidFill>
-                  <a:srgbClr val="1C1C1C"/>
-                </a:solidFill>
-                <a:latin typeface="Orbitron Bold" pitchFamily="34" charset="0"/>
-                <a:ea typeface="Orbitron Bold" pitchFamily="34" charset="-122"/>
-                <a:cs typeface="Orbitron Bold" pitchFamily="34" charset="-120"/>
-              </a:rPr>
-              <a:t>That is a poster, not a program</a:t>
-            </a:r>
-            <a:endParaRPr lang="en-US" sz="1850" dirty="0"/>
-          </a:p>
-        </p:txBody>
-      </p:sp>
-      <p:sp>
-        <p:nvSpPr>
-          <p:cNvPr id="12" name="Text 5"/>
-          <p:cNvSpPr/>
-          <p:nvPr/>
-        </p:nvSpPr>
-        <p:spPr>
-          <a:xfrm>
-            <a:off x="132255" y="6457255"/>
-            <a:ext cx="3640642" cy="158750"/>
-          </a:xfrm>
-          <a:prstGeom prst="rect">
-            <a:avLst/>
-          </a:prstGeom>
-          <a:noFill/>
-          <a:ln/>
-        </p:spPr>
-        <p:txBody>
-          <a:bodyPr wrap="none" lIns="0" tIns="99235" rIns="59541" bIns="0" rtlCol="0" anchor="t"/>
+          <a:bodyPr wrap="none" lIns="99235" tIns="0" rIns="59541" bIns="0" rtlCol="0" anchor="t"/>
           <a:lstStyle/>
           <a:p>
             <a:pPr algn="l" indent="0" marL="0">
@@ -3414,7 +2690,7 @@
         </p:nvSpPr>
         <p:spPr>
           <a:xfrm>
-            <a:off x="661475" y="1198761"/>
+            <a:off x="661475" y="2226568"/>
             <a:ext cx="6296860" cy="590649"/>
           </a:xfrm>
           <a:prstGeom prst="rect">
@@ -3450,30 +2726,111 @@
       </p:sp>
       <p:sp>
         <p:nvSpPr>
-          <p:cNvPr id="4" name="Shape 1"/>
+          <p:cNvPr id="4" name="Text 1"/>
           <p:cNvSpPr/>
           <p:nvPr/>
         </p:nvSpPr>
         <p:spPr>
           <a:xfrm>
-            <a:off x="661475" y="2072878"/>
-            <a:ext cx="6296860" cy="724098"/>
-          </a:xfrm>
-          <a:prstGeom prst="roundRect">
-            <a:avLst>
-              <a:gd name="adj" fmla="val 10964"/>
-            </a:avLst>
-          </a:prstGeom>
-          <a:solidFill>
-            <a:srgbClr val="FFFFFF"/>
-          </a:solidFill>
-          <a:ln w="25399">
-            <a:solidFill>
-              <a:srgbClr val="B7CBE0"/>
-            </a:solidFill>
-            <a:prstDash val="solid"/>
-          </a:ln>
-        </p:spPr>
+            <a:off x="661475" y="3100685"/>
+            <a:ext cx="6296860" cy="1407914"/>
+          </a:xfrm>
+          <a:prstGeom prst="rect">
+            <a:avLst/>
+          </a:prstGeom>
+          <a:noFill/>
+          <a:ln/>
+        </p:spPr>
+        <p:txBody>
+          <a:bodyPr wrap="square" lIns="0" tIns="0" rIns="0" bIns="0" rtlCol="0" anchor="t">
+            <a:normAutofit/>
+          </a:bodyPr>
+          <a:lstStyle/>
+          <a:p>
+            <a:pPr algn="l" marL="294640" indent="-294640">
+              <a:lnSpc>
+                <a:spcPct val="133000"/>
+              </a:lnSpc>
+              <a:buSzPct val="100000"/>
+              <a:buChar char="•"/>
+            </a:pPr>
+            <a:r>
+              <a:rPr lang="en-US" sz="1450" dirty="0">
+                <a:solidFill>
+                  <a:srgbClr val="1C1C1C"/>
+                </a:solidFill>
+                <a:latin typeface="Roboto Condensed" pitchFamily="34" charset="0"/>
+                <a:ea typeface="Roboto Condensed" pitchFamily="34" charset="-122"/>
+                <a:cs typeface="Roboto Condensed" pitchFamily="34" charset="-120"/>
+              </a:rPr>
+              <a:t>A value sits somewhere in memory</a:t>
+            </a:r>
+            <a:endParaRPr lang="en-US" sz="1450" dirty="0"/>
+          </a:p>
+          <a:p>
+            <a:pPr algn="l" marL="294640" indent="-294640">
+              <a:lnSpc>
+                <a:spcPct val="133000"/>
+              </a:lnSpc>
+              <a:buSzPct val="100000"/>
+              <a:buChar char="•"/>
+            </a:pPr>
+            <a:r>
+              <a:rPr lang="en-US" sz="1450" dirty="0">
+                <a:solidFill>
+                  <a:srgbClr val="1C1C1C"/>
+                </a:solidFill>
+                <a:latin typeface="Roboto Condensed" pitchFamily="34" charset="0"/>
+                <a:ea typeface="Roboto Condensed" pitchFamily="34" charset="-122"/>
+                <a:cs typeface="Roboto Condensed" pitchFamily="34" charset="-120"/>
+              </a:rPr>
+              <a:t>A name is a tag tied to it</a:t>
+            </a:r>
+            <a:endParaRPr lang="en-US" sz="1450" dirty="0"/>
+          </a:p>
+          <a:p>
+            <a:pPr algn="l" marL="294640" indent="-294640">
+              <a:lnSpc>
+                <a:spcPct val="133000"/>
+              </a:lnSpc>
+              <a:buSzPct val="100000"/>
+              <a:buChar char="•"/>
+            </a:pPr>
+            <a:r>
+              <a:rPr lang="en-US" sz="1450" dirty="0">
+                <a:solidFill>
+                  <a:srgbClr val="1C1C1C"/>
+                </a:solidFill>
+                <a:latin typeface="Roboto Condensed" pitchFamily="34" charset="0"/>
+                <a:ea typeface="Roboto Condensed" pitchFamily="34" charset="-122"/>
+                <a:cs typeface="Roboto Condensed" pitchFamily="34" charset="-120"/>
+              </a:rPr>
+              <a:t>Equals ties the tag</a:t>
+            </a:r>
+            <a:endParaRPr lang="en-US" sz="1450" dirty="0"/>
+          </a:p>
+          <a:p>
+            <a:pPr algn="l" marL="294640" indent="-294640">
+              <a:lnSpc>
+                <a:spcPct val="133000"/>
+              </a:lnSpc>
+              <a:buSzPct val="100000"/>
+              <a:buChar char="•"/>
+            </a:pPr>
+            <a:r>
+              <a:rPr lang="en-US" sz="1450" dirty="0">
+                <a:solidFill>
+                  <a:srgbClr val="1C1C1C"/>
+                </a:solidFill>
+                <a:latin typeface="Roboto Condensed" pitchFamily="34" charset="0"/>
+                <a:ea typeface="Roboto Condensed" pitchFamily="34" charset="-122"/>
+                <a:cs typeface="Roboto Condensed" pitchFamily="34" charset="-120"/>
+              </a:rPr>
+              <a:t>Say "gets", never "equals"</a:t>
+            </a:r>
+            <a:endParaRPr lang="en-US" sz="1450" dirty="0"/>
+          </a:p>
+        </p:txBody>
       </p:sp>
       <p:sp>
         <p:nvSpPr>
@@ -3483,8 +2840,8 @@
         </p:nvSpPr>
         <p:spPr>
           <a:xfrm>
-            <a:off x="875881" y="2287290"/>
-            <a:ext cx="5868047" cy="295275"/>
+            <a:off x="132255" y="6457255"/>
+            <a:ext cx="3640642" cy="158750"/>
           </a:xfrm>
           <a:prstGeom prst="rect">
             <a:avLst/>
@@ -3493,256 +2850,7 @@
           <a:ln/>
         </p:spPr>
         <p:txBody>
-          <a:bodyPr wrap="none" lIns="0" tIns="0" rIns="0" bIns="0" rtlCol="0" anchor="t"/>
-          <a:lstStyle/>
-          <a:p>
-            <a:pPr algn="l" indent="0" marL="0">
-              <a:lnSpc>
-                <a:spcPct val="104000"/>
-              </a:lnSpc>
-              <a:buNone/>
-            </a:pPr>
-            <a:r>
-              <a:rPr lang="en-US" sz="1850" b="1" dirty="0">
-                <a:solidFill>
-                  <a:srgbClr val="1C1C1C"/>
-                </a:solidFill>
-                <a:latin typeface="Orbitron Bold" pitchFamily="34" charset="0"/>
-                <a:ea typeface="Orbitron Bold" pitchFamily="34" charset="-122"/>
-                <a:cs typeface="Orbitron Bold" pitchFamily="34" charset="-120"/>
-              </a:rPr>
-              <a:t>A value sits somewhere in memory</a:t>
-            </a:r>
-            <a:endParaRPr lang="en-US" sz="1850" dirty="0"/>
-          </a:p>
-        </p:txBody>
-      </p:sp>
-      <p:sp>
-        <p:nvSpPr>
-          <p:cNvPr id="6" name="Shape 3"/>
-          <p:cNvSpPr/>
-          <p:nvPr/>
-        </p:nvSpPr>
-        <p:spPr>
-          <a:xfrm>
-            <a:off x="661475" y="2985988"/>
-            <a:ext cx="6296860" cy="724098"/>
-          </a:xfrm>
-          <a:prstGeom prst="roundRect">
-            <a:avLst>
-              <a:gd name="adj" fmla="val 10964"/>
-            </a:avLst>
-          </a:prstGeom>
-          <a:solidFill>
-            <a:srgbClr val="FFFFFF"/>
-          </a:solidFill>
-          <a:ln w="25399">
-            <a:solidFill>
-              <a:srgbClr val="B7CBE0"/>
-            </a:solidFill>
-            <a:prstDash val="solid"/>
-          </a:ln>
-        </p:spPr>
-      </p:sp>
-      <p:sp>
-        <p:nvSpPr>
-          <p:cNvPr id="7" name="Text 4"/>
-          <p:cNvSpPr/>
-          <p:nvPr/>
-        </p:nvSpPr>
-        <p:spPr>
-          <a:xfrm>
-            <a:off x="875881" y="3200400"/>
-            <a:ext cx="5868047" cy="295275"/>
-          </a:xfrm>
-          <a:prstGeom prst="rect">
-            <a:avLst/>
-          </a:prstGeom>
-          <a:noFill/>
-          <a:ln/>
-        </p:spPr>
-        <p:txBody>
-          <a:bodyPr wrap="none" lIns="0" tIns="0" rIns="0" bIns="0" rtlCol="0" anchor="t"/>
-          <a:lstStyle/>
-          <a:p>
-            <a:pPr algn="l" indent="0" marL="0">
-              <a:lnSpc>
-                <a:spcPct val="104000"/>
-              </a:lnSpc>
-              <a:buNone/>
-            </a:pPr>
-            <a:r>
-              <a:rPr lang="en-US" sz="1850" b="1" dirty="0">
-                <a:solidFill>
-                  <a:srgbClr val="1C1C1C"/>
-                </a:solidFill>
-                <a:latin typeface="Orbitron Bold" pitchFamily="34" charset="0"/>
-                <a:ea typeface="Orbitron Bold" pitchFamily="34" charset="-122"/>
-                <a:cs typeface="Orbitron Bold" pitchFamily="34" charset="-120"/>
-              </a:rPr>
-              <a:t>A name is a tag tied to it</a:t>
-            </a:r>
-            <a:endParaRPr lang="en-US" sz="1850" dirty="0"/>
-          </a:p>
-        </p:txBody>
-      </p:sp>
-      <p:sp>
-        <p:nvSpPr>
-          <p:cNvPr id="8" name="Shape 5"/>
-          <p:cNvSpPr/>
-          <p:nvPr/>
-        </p:nvSpPr>
-        <p:spPr>
-          <a:xfrm>
-            <a:off x="661475" y="3899098"/>
-            <a:ext cx="6296860" cy="724098"/>
-          </a:xfrm>
-          <a:prstGeom prst="roundRect">
-            <a:avLst>
-              <a:gd name="adj" fmla="val 10964"/>
-            </a:avLst>
-          </a:prstGeom>
-          <a:solidFill>
-            <a:srgbClr val="FFFFFF"/>
-          </a:solidFill>
-          <a:ln w="25399">
-            <a:solidFill>
-              <a:srgbClr val="B7CBE0"/>
-            </a:solidFill>
-            <a:prstDash val="solid"/>
-          </a:ln>
-        </p:spPr>
-      </p:sp>
-      <p:sp>
-        <p:nvSpPr>
-          <p:cNvPr id="9" name="Text 6"/>
-          <p:cNvSpPr/>
-          <p:nvPr/>
-        </p:nvSpPr>
-        <p:spPr>
-          <a:xfrm>
-            <a:off x="875881" y="4113510"/>
-            <a:ext cx="5868047" cy="295275"/>
-          </a:xfrm>
-          <a:prstGeom prst="rect">
-            <a:avLst/>
-          </a:prstGeom>
-          <a:noFill/>
-          <a:ln/>
-        </p:spPr>
-        <p:txBody>
-          <a:bodyPr wrap="none" lIns="0" tIns="0" rIns="0" bIns="0" rtlCol="0" anchor="t"/>
-          <a:lstStyle/>
-          <a:p>
-            <a:pPr algn="l" indent="0" marL="0">
-              <a:lnSpc>
-                <a:spcPct val="104000"/>
-              </a:lnSpc>
-              <a:buNone/>
-            </a:pPr>
-            <a:r>
-              <a:rPr lang="en-US" sz="1850" b="1" dirty="0">
-                <a:solidFill>
-                  <a:srgbClr val="1C1C1C"/>
-                </a:solidFill>
-                <a:latin typeface="Orbitron Bold" pitchFamily="34" charset="0"/>
-                <a:ea typeface="Orbitron Bold" pitchFamily="34" charset="-122"/>
-                <a:cs typeface="Orbitron Bold" pitchFamily="34" charset="-120"/>
-              </a:rPr>
-              <a:t>Equals ties the tag</a:t>
-            </a:r>
-            <a:endParaRPr lang="en-US" sz="1850" dirty="0"/>
-          </a:p>
-        </p:txBody>
-      </p:sp>
-      <p:sp>
-        <p:nvSpPr>
-          <p:cNvPr id="10" name="Shape 7"/>
-          <p:cNvSpPr/>
-          <p:nvPr/>
-        </p:nvSpPr>
-        <p:spPr>
-          <a:xfrm>
-            <a:off x="661475" y="4812209"/>
-            <a:ext cx="6296860" cy="724098"/>
-          </a:xfrm>
-          <a:prstGeom prst="roundRect">
-            <a:avLst>
-              <a:gd name="adj" fmla="val 10964"/>
-            </a:avLst>
-          </a:prstGeom>
-          <a:solidFill>
-            <a:srgbClr val="FFFFFF"/>
-          </a:solidFill>
-          <a:ln w="25399">
-            <a:solidFill>
-              <a:srgbClr val="B7CBE0"/>
-            </a:solidFill>
-            <a:prstDash val="solid"/>
-          </a:ln>
-        </p:spPr>
-      </p:sp>
-      <p:sp>
-        <p:nvSpPr>
-          <p:cNvPr id="11" name="Text 8"/>
-          <p:cNvSpPr/>
-          <p:nvPr/>
-        </p:nvSpPr>
-        <p:spPr>
-          <a:xfrm>
-            <a:off x="875881" y="5026620"/>
-            <a:ext cx="5868047" cy="295275"/>
-          </a:xfrm>
-          <a:prstGeom prst="rect">
-            <a:avLst/>
-          </a:prstGeom>
-          <a:noFill/>
-          <a:ln/>
-        </p:spPr>
-        <p:txBody>
-          <a:bodyPr wrap="none" lIns="0" tIns="0" rIns="0" bIns="0" rtlCol="0" anchor="t"/>
-          <a:lstStyle/>
-          <a:p>
-            <a:pPr algn="l" indent="0" marL="0">
-              <a:lnSpc>
-                <a:spcPct val="104000"/>
-              </a:lnSpc>
-              <a:buNone/>
-            </a:pPr>
-            <a:r>
-              <a:rPr lang="en-US" sz="1850" b="1" dirty="0">
-                <a:solidFill>
-                  <a:srgbClr val="1C1C1C"/>
-                </a:solidFill>
-                <a:latin typeface="Orbitron Bold" pitchFamily="34" charset="0"/>
-                <a:ea typeface="Orbitron Bold" pitchFamily="34" charset="-122"/>
-                <a:cs typeface="Orbitron Bold" pitchFamily="34" charset="-120"/>
-              </a:rPr>
-              <a:t>Say "gets", never "equals"</a:t>
-            </a:r>
-            <a:endParaRPr lang="en-US" sz="1850" dirty="0"/>
-          </a:p>
-        </p:txBody>
-      </p:sp>
-      <p:sp>
-        <p:nvSpPr>
-          <p:cNvPr id="12" name="Text 9"/>
-          <p:cNvSpPr/>
-          <p:nvPr/>
-        </p:nvSpPr>
-        <p:spPr>
-          <a:xfrm>
-            <a:off x="132255" y="6457255"/>
-            <a:ext cx="3640642" cy="158750"/>
-          </a:xfrm>
-          <a:prstGeom prst="rect">
-            <a:avLst/>
-          </a:prstGeom>
-          <a:noFill/>
-          <a:ln/>
-        </p:spPr>
-        <p:txBody>
-          <a:bodyPr wrap="none" lIns="0" tIns="99235" rIns="59541" bIns="0" rtlCol="0" anchor="t"/>
+          <a:bodyPr wrap="none" lIns="99235" tIns="0" rIns="59541" bIns="0" rtlCol="0" anchor="t"/>
           <a:lstStyle/>
           <a:p>
             <a:pPr algn="l" indent="0" marL="0">
@@ -3957,7 +3065,7 @@
           <a:ln/>
         </p:spPr>
         <p:txBody>
-          <a:bodyPr wrap="none" lIns="0" tIns="99235" rIns="59541" bIns="0" rtlCol="0" anchor="t"/>
+          <a:bodyPr wrap="none" lIns="99235" tIns="0" rIns="59541" bIns="0" rtlCol="0" anchor="t"/>
           <a:lstStyle/>
           <a:p>
             <a:pPr algn="l" indent="0" marL="0">
@@ -4006,40 +3114,16 @@
           <a:chExt cx="0" cy="0"/>
         </a:xfrm>
       </p:grpSpPr>
-      <p:pic>
-        <p:nvPicPr>
-          <p:cNvPr id="2" name="Image 0" descr="preencoded.png">    </p:cNvPr>
-          <p:cNvPicPr>
-            <a:picLocks noChangeAspect="1"/>
-          </p:cNvPicPr>
-          <p:nvPr/>
-        </p:nvPicPr>
-        <p:blipFill>
-          <a:blip r:embed="rId1"/>
-          <a:stretch>
-            <a:fillRect/>
-          </a:stretch>
-        </p:blipFill>
-        <p:spPr>
-          <a:xfrm>
-            <a:off x="7619809" y="0"/>
-            <a:ext cx="4571886" cy="6858000"/>
-          </a:xfrm>
-          <a:prstGeom prst="rect">
-            <a:avLst/>
-          </a:prstGeom>
-        </p:spPr>
-      </p:pic>
-      <p:sp>
-        <p:nvSpPr>
-          <p:cNvPr id="3" name="Text 0"/>
+      <p:sp>
+        <p:nvSpPr>
+          <p:cNvPr id="2" name="Text 0"/>
           <p:cNvSpPr/>
           <p:nvPr/>
         </p:nvSpPr>
         <p:spPr>
           <a:xfrm>
-            <a:off x="661475" y="2294930"/>
-            <a:ext cx="6296860" cy="1181298"/>
+            <a:off x="661475" y="2542977"/>
+            <a:ext cx="10868745" cy="590649"/>
           </a:xfrm>
           <a:prstGeom prst="rect">
             <a:avLst/>
@@ -4048,9 +3132,7 @@
           <a:ln/>
         </p:spPr>
         <p:txBody>
-          <a:bodyPr wrap="square" lIns="0" tIns="0" rIns="0" bIns="0" rtlCol="0" anchor="t">
-            <a:normAutofit/>
-          </a:bodyPr>
+          <a:bodyPr wrap="none" lIns="0" tIns="0" rIns="0" bIns="0" rtlCol="0" anchor="t"/>
           <a:lstStyle/>
           <a:p>
             <a:pPr algn="l" indent="0" marL="0">
@@ -4076,14 +3158,14 @@
       </p:sp>
       <p:sp>
         <p:nvSpPr>
-          <p:cNvPr id="4" name="Shape 1"/>
+          <p:cNvPr id="3" name="Shape 1"/>
           <p:cNvSpPr/>
           <p:nvPr/>
         </p:nvSpPr>
         <p:spPr>
           <a:xfrm>
-            <a:off x="661475" y="3759696"/>
-            <a:ext cx="6296860" cy="680442"/>
+            <a:off x="661475" y="3511649"/>
+            <a:ext cx="10868745" cy="680442"/>
           </a:xfrm>
           <a:prstGeom prst="roundRect">
             <a:avLst>
@@ -4098,14 +3180,14 @@
       </p:sp>
       <p:sp>
         <p:nvSpPr>
-          <p:cNvPr id="5" name="Text 2"/>
+          <p:cNvPr id="4" name="Text 2"/>
           <p:cNvSpPr/>
           <p:nvPr/>
         </p:nvSpPr>
         <p:spPr>
           <a:xfrm>
-            <a:off x="888283" y="3948708"/>
-            <a:ext cx="6452828" cy="302419"/>
+            <a:off x="888283" y="3700661"/>
+            <a:ext cx="11024713" cy="302419"/>
           </a:xfrm>
           <a:prstGeom prst="rect">
             <a:avLst/>
@@ -4140,7 +3222,7 @@
       </p:sp>
       <p:sp>
         <p:nvSpPr>
-          <p:cNvPr id="6" name="Text 3"/>
+          <p:cNvPr id="5" name="Text 3"/>
           <p:cNvSpPr/>
           <p:nvPr/>
         </p:nvSpPr>
@@ -4156,7 +3238,7 @@
           <a:ln/>
         </p:spPr>
         <p:txBody>
-          <a:bodyPr wrap="none" lIns="0" tIns="99235" rIns="59541" bIns="0" rtlCol="0" anchor="t"/>
+          <a:bodyPr wrap="none" lIns="99235" tIns="0" rIns="59541" bIns="0" rtlCol="0" anchor="t"/>
           <a:lstStyle/>
           <a:p>
             <a:pPr algn="l" indent="0" marL="0">
@@ -4411,7 +3493,7 @@
           <a:ln/>
         </p:spPr>
         <p:txBody>
-          <a:bodyPr wrap="none" lIns="0" tIns="99235" rIns="59541" bIns="0" rtlCol="0" anchor="t"/>
+          <a:bodyPr wrap="none" lIns="99235" tIns="0" rIns="59541" bIns="0" rtlCol="0" anchor="t"/>
           <a:lstStyle/>
           <a:p>
             <a:pPr algn="l" indent="0" marL="0">
@@ -4476,7 +3558,7 @@
         </p:blipFill>
         <p:spPr>
           <a:xfrm>
-            <a:off x="0" y="0"/>
+            <a:off x="7619809" y="0"/>
             <a:ext cx="4571886" cy="6858000"/>
           </a:xfrm>
           <a:prstGeom prst="rect">
@@ -4492,7 +3574,7 @@
         </p:nvSpPr>
         <p:spPr>
           <a:xfrm>
-            <a:off x="5233360" y="1282799"/>
+            <a:off x="661475" y="2226568"/>
             <a:ext cx="6296860" cy="590649"/>
           </a:xfrm>
           <a:prstGeom prst="rect">
@@ -4528,30 +3610,111 @@
       </p:sp>
       <p:sp>
         <p:nvSpPr>
-          <p:cNvPr id="4" name="Shape 1"/>
+          <p:cNvPr id="4" name="Text 1"/>
           <p:cNvSpPr/>
           <p:nvPr/>
         </p:nvSpPr>
         <p:spPr>
           <a:xfrm>
-            <a:off x="5233360" y="2156916"/>
-            <a:ext cx="425241" cy="425252"/>
-          </a:xfrm>
-          <a:prstGeom prst="roundRect">
-            <a:avLst>
-              <a:gd name="adj" fmla="val 18669"/>
-            </a:avLst>
-          </a:prstGeom>
-          <a:solidFill>
-            <a:srgbClr val="D1E5FA"/>
-          </a:solidFill>
-          <a:ln w="19050">
-            <a:solidFill>
-              <a:srgbClr val="B7CBE0"/>
-            </a:solidFill>
-            <a:prstDash val="solid"/>
-          </a:ln>
-        </p:spPr>
+            <a:off x="661475" y="3100685"/>
+            <a:ext cx="6296860" cy="1407914"/>
+          </a:xfrm>
+          <a:prstGeom prst="rect">
+            <a:avLst/>
+          </a:prstGeom>
+          <a:noFill/>
+          <a:ln/>
+        </p:spPr>
+        <p:txBody>
+          <a:bodyPr wrap="square" lIns="0" tIns="0" rIns="0" bIns="0" rtlCol="0" anchor="t">
+            <a:normAutofit/>
+          </a:bodyPr>
+          <a:lstStyle/>
+          <a:p>
+            <a:pPr algn="l" marL="294640" indent="-294640">
+              <a:lnSpc>
+                <a:spcPct val="133000"/>
+              </a:lnSpc>
+              <a:buSzPct val="100000"/>
+              <a:buChar char="•"/>
+            </a:pPr>
+            <a:r>
+              <a:rPr lang="en-US" sz="1450" dirty="0">
+                <a:solidFill>
+                  <a:srgbClr val="1C1C1C"/>
+                </a:solidFill>
+                <a:latin typeface="Roboto Condensed" pitchFamily="34" charset="0"/>
+                <a:ea typeface="Roboto Condensed" pitchFamily="34" charset="-122"/>
+                <a:cs typeface="Roboto Condensed" pitchFamily="34" charset="-120"/>
+              </a:rPr>
+              <a:t>Line three ran once, when Python reached it</a:t>
+            </a:r>
+            <a:endParaRPr lang="en-US" sz="1450" dirty="0"/>
+          </a:p>
+          <a:p>
+            <a:pPr algn="l" marL="294640" indent="-294640">
+              <a:lnSpc>
+                <a:spcPct val="133000"/>
+              </a:lnSpc>
+              <a:buSzPct val="100000"/>
+              <a:buChar char="•"/>
+            </a:pPr>
+            <a:r>
+              <a:rPr lang="en-US" sz="1450" dirty="0">
+                <a:solidFill>
+                  <a:srgbClr val="1C1C1C"/>
+                </a:solidFill>
+                <a:latin typeface="Roboto Condensed" pitchFamily="34" charset="0"/>
+                <a:ea typeface="Roboto Condensed" pitchFamily="34" charset="-122"/>
+                <a:cs typeface="Roboto Condensed" pitchFamily="34" charset="-120"/>
+              </a:rPr>
+              <a:t>It used the values that existed at that moment</a:t>
+            </a:r>
+            <a:endParaRPr lang="en-US" sz="1450" dirty="0"/>
+          </a:p>
+          <a:p>
+            <a:pPr algn="l" marL="294640" indent="-294640">
+              <a:lnSpc>
+                <a:spcPct val="133000"/>
+              </a:lnSpc>
+              <a:buSzPct val="100000"/>
+              <a:buChar char="•"/>
+            </a:pPr>
+            <a:r>
+              <a:rPr lang="en-US" sz="1450" dirty="0">
+                <a:solidFill>
+                  <a:srgbClr val="1C1C1C"/>
+                </a:solidFill>
+                <a:latin typeface="Roboto Condensed" pitchFamily="34" charset="0"/>
+                <a:ea typeface="Roboto Condensed" pitchFamily="34" charset="-122"/>
+                <a:cs typeface="Roboto Condensed" pitchFamily="34" charset="-120"/>
+              </a:rPr>
+              <a:t>Changing shifts later changes nothing</a:t>
+            </a:r>
+            <a:endParaRPr lang="en-US" sz="1450" dirty="0"/>
+          </a:p>
+          <a:p>
+            <a:pPr algn="l" marL="294640" indent="-294640">
+              <a:lnSpc>
+                <a:spcPct val="133000"/>
+              </a:lnSpc>
+              <a:buSzPct val="100000"/>
+              <a:buChar char="•"/>
+            </a:pPr>
+            <a:r>
+              <a:rPr lang="en-US" sz="1450" dirty="0">
+                <a:solidFill>
+                  <a:srgbClr val="1C1C1C"/>
+                </a:solidFill>
+                <a:latin typeface="Roboto Condensed" pitchFamily="34" charset="0"/>
+                <a:ea typeface="Roboto Condensed" pitchFamily="34" charset="-122"/>
+                <a:cs typeface="Roboto Condensed" pitchFamily="34" charset="-120"/>
+              </a:rPr>
+              <a:t>Nothing is watching anything</a:t>
+            </a:r>
+            <a:endParaRPr lang="en-US" sz="1450" dirty="0"/>
+          </a:p>
+        </p:txBody>
       </p:sp>
       <p:sp>
         <p:nvSpPr>
@@ -4561,8 +3724,8 @@
         </p:nvSpPr>
         <p:spPr>
           <a:xfrm>
-            <a:off x="5847608" y="2221805"/>
-            <a:ext cx="5682612" cy="590550"/>
+            <a:off x="132255" y="6457255"/>
+            <a:ext cx="3640642" cy="158750"/>
           </a:xfrm>
           <a:prstGeom prst="rect">
             <a:avLst/>
@@ -4571,260 +3734,7 @@
           <a:ln/>
         </p:spPr>
         <p:txBody>
-          <a:bodyPr wrap="square" lIns="0" tIns="0" rIns="0" bIns="0" rtlCol="0" anchor="t">
-            <a:normAutofit/>
-          </a:bodyPr>
-          <a:lstStyle/>
-          <a:p>
-            <a:pPr algn="l" indent="0" marL="0">
-              <a:lnSpc>
-                <a:spcPct val="104000"/>
-              </a:lnSpc>
-              <a:buNone/>
-            </a:pPr>
-            <a:r>
-              <a:rPr lang="en-US" sz="1850" b="1" dirty="0">
-                <a:solidFill>
-                  <a:srgbClr val="1C1C1C"/>
-                </a:solidFill>
-                <a:latin typeface="Orbitron Bold" pitchFamily="34" charset="0"/>
-                <a:ea typeface="Orbitron Bold" pitchFamily="34" charset="-122"/>
-                <a:cs typeface="Orbitron Bold" pitchFamily="34" charset="-120"/>
-              </a:rPr>
-              <a:t>Line three ran once, when Python reached it</a:t>
-            </a:r>
-            <a:endParaRPr lang="en-US" sz="1850" dirty="0"/>
-          </a:p>
-        </p:txBody>
-      </p:sp>
-      <p:sp>
-        <p:nvSpPr>
-          <p:cNvPr id="6" name="Shape 3"/>
-          <p:cNvSpPr/>
-          <p:nvPr/>
-        </p:nvSpPr>
-        <p:spPr>
-          <a:xfrm>
-            <a:off x="5233360" y="3190379"/>
-            <a:ext cx="425241" cy="425252"/>
-          </a:xfrm>
-          <a:prstGeom prst="roundRect">
-            <a:avLst>
-              <a:gd name="adj" fmla="val 18669"/>
-            </a:avLst>
-          </a:prstGeom>
-          <a:solidFill>
-            <a:srgbClr val="D1E5FA"/>
-          </a:solidFill>
-          <a:ln w="19050">
-            <a:solidFill>
-              <a:srgbClr val="B7CBE0"/>
-            </a:solidFill>
-            <a:prstDash val="solid"/>
-          </a:ln>
-        </p:spPr>
-      </p:sp>
-      <p:sp>
-        <p:nvSpPr>
-          <p:cNvPr id="7" name="Text 4"/>
-          <p:cNvSpPr/>
-          <p:nvPr/>
-        </p:nvSpPr>
-        <p:spPr>
-          <a:xfrm>
-            <a:off x="5847608" y="3255268"/>
-            <a:ext cx="5682612" cy="590550"/>
-          </a:xfrm>
-          <a:prstGeom prst="rect">
-            <a:avLst/>
-          </a:prstGeom>
-          <a:noFill/>
-          <a:ln/>
-        </p:spPr>
-        <p:txBody>
-          <a:bodyPr wrap="square" lIns="0" tIns="0" rIns="0" bIns="0" rtlCol="0" anchor="t">
-            <a:normAutofit/>
-          </a:bodyPr>
-          <a:lstStyle/>
-          <a:p>
-            <a:pPr algn="l" indent="0" marL="0">
-              <a:lnSpc>
-                <a:spcPct val="104000"/>
-              </a:lnSpc>
-              <a:buNone/>
-            </a:pPr>
-            <a:r>
-              <a:rPr lang="en-US" sz="1850" b="1" dirty="0">
-                <a:solidFill>
-                  <a:srgbClr val="1C1C1C"/>
-                </a:solidFill>
-                <a:latin typeface="Orbitron Bold" pitchFamily="34" charset="0"/>
-                <a:ea typeface="Orbitron Bold" pitchFamily="34" charset="-122"/>
-                <a:cs typeface="Orbitron Bold" pitchFamily="34" charset="-120"/>
-              </a:rPr>
-              <a:t>It used the values that existed at that moment</a:t>
-            </a:r>
-            <a:endParaRPr lang="en-US" sz="1850" dirty="0"/>
-          </a:p>
-        </p:txBody>
-      </p:sp>
-      <p:sp>
-        <p:nvSpPr>
-          <p:cNvPr id="8" name="Shape 5"/>
-          <p:cNvSpPr/>
-          <p:nvPr/>
-        </p:nvSpPr>
-        <p:spPr>
-          <a:xfrm>
-            <a:off x="5233360" y="4223841"/>
-            <a:ext cx="425241" cy="425252"/>
-          </a:xfrm>
-          <a:prstGeom prst="roundRect">
-            <a:avLst>
-              <a:gd name="adj" fmla="val 18669"/>
-            </a:avLst>
-          </a:prstGeom>
-          <a:solidFill>
-            <a:srgbClr val="D1E5FA"/>
-          </a:solidFill>
-          <a:ln w="19050">
-            <a:solidFill>
-              <a:srgbClr val="B7CBE0"/>
-            </a:solidFill>
-            <a:prstDash val="solid"/>
-          </a:ln>
-        </p:spPr>
-      </p:sp>
-      <p:sp>
-        <p:nvSpPr>
-          <p:cNvPr id="9" name="Text 6"/>
-          <p:cNvSpPr/>
-          <p:nvPr/>
-        </p:nvSpPr>
-        <p:spPr>
-          <a:xfrm>
-            <a:off x="5847608" y="4288730"/>
-            <a:ext cx="5682612" cy="295275"/>
-          </a:xfrm>
-          <a:prstGeom prst="rect">
-            <a:avLst/>
-          </a:prstGeom>
-          <a:noFill/>
-          <a:ln/>
-        </p:spPr>
-        <p:txBody>
-          <a:bodyPr wrap="none" lIns="0" tIns="0" rIns="0" bIns="0" rtlCol="0" anchor="t"/>
-          <a:lstStyle/>
-          <a:p>
-            <a:pPr algn="l" indent="0" marL="0">
-              <a:lnSpc>
-                <a:spcPct val="104000"/>
-              </a:lnSpc>
-              <a:buNone/>
-            </a:pPr>
-            <a:r>
-              <a:rPr lang="en-US" sz="1850" b="1" dirty="0">
-                <a:solidFill>
-                  <a:srgbClr val="1C1C1C"/>
-                </a:solidFill>
-                <a:latin typeface="Orbitron Bold" pitchFamily="34" charset="0"/>
-                <a:ea typeface="Orbitron Bold" pitchFamily="34" charset="-122"/>
-                <a:cs typeface="Orbitron Bold" pitchFamily="34" charset="-120"/>
-              </a:rPr>
-              <a:t>Changing shifts later changes nothing</a:t>
-            </a:r>
-            <a:endParaRPr lang="en-US" sz="1850" dirty="0"/>
-          </a:p>
-        </p:txBody>
-      </p:sp>
-      <p:sp>
-        <p:nvSpPr>
-          <p:cNvPr id="10" name="Shape 7"/>
-          <p:cNvSpPr/>
-          <p:nvPr/>
-        </p:nvSpPr>
-        <p:spPr>
-          <a:xfrm>
-            <a:off x="5233360" y="5027116"/>
-            <a:ext cx="425241" cy="425252"/>
-          </a:xfrm>
-          <a:prstGeom prst="roundRect">
-            <a:avLst>
-              <a:gd name="adj" fmla="val 18669"/>
-            </a:avLst>
-          </a:prstGeom>
-          <a:solidFill>
-            <a:srgbClr val="D1E5FA"/>
-          </a:solidFill>
-          <a:ln w="19050">
-            <a:solidFill>
-              <a:srgbClr val="B7CBE0"/>
-            </a:solidFill>
-            <a:prstDash val="solid"/>
-          </a:ln>
-        </p:spPr>
-      </p:sp>
-      <p:sp>
-        <p:nvSpPr>
-          <p:cNvPr id="11" name="Text 8"/>
-          <p:cNvSpPr/>
-          <p:nvPr/>
-        </p:nvSpPr>
-        <p:spPr>
-          <a:xfrm>
-            <a:off x="5847608" y="5092005"/>
-            <a:ext cx="5682612" cy="295275"/>
-          </a:xfrm>
-          <a:prstGeom prst="rect">
-            <a:avLst/>
-          </a:prstGeom>
-          <a:noFill/>
-          <a:ln/>
-        </p:spPr>
-        <p:txBody>
-          <a:bodyPr wrap="none" lIns="0" tIns="0" rIns="0" bIns="0" rtlCol="0" anchor="t"/>
-          <a:lstStyle/>
-          <a:p>
-            <a:pPr algn="l" indent="0" marL="0">
-              <a:lnSpc>
-                <a:spcPct val="104000"/>
-              </a:lnSpc>
-              <a:buNone/>
-            </a:pPr>
-            <a:r>
-              <a:rPr lang="en-US" sz="1850" b="1" dirty="0">
-                <a:solidFill>
-                  <a:srgbClr val="1C1C1C"/>
-                </a:solidFill>
-                <a:latin typeface="Orbitron Bold" pitchFamily="34" charset="0"/>
-                <a:ea typeface="Orbitron Bold" pitchFamily="34" charset="-122"/>
-                <a:cs typeface="Orbitron Bold" pitchFamily="34" charset="-120"/>
-              </a:rPr>
-              <a:t>Nothing is watching anything</a:t>
-            </a:r>
-            <a:endParaRPr lang="en-US" sz="1850" dirty="0"/>
-          </a:p>
-        </p:txBody>
-      </p:sp>
-      <p:sp>
-        <p:nvSpPr>
-          <p:cNvPr id="12" name="Text 9"/>
-          <p:cNvSpPr/>
-          <p:nvPr/>
-        </p:nvSpPr>
-        <p:spPr>
-          <a:xfrm>
-            <a:off x="4704141" y="6457255"/>
-            <a:ext cx="3640642" cy="158750"/>
-          </a:xfrm>
-          <a:prstGeom prst="rect">
-            <a:avLst/>
-          </a:prstGeom>
-          <a:noFill/>
-          <a:ln/>
-        </p:spPr>
-        <p:txBody>
-          <a:bodyPr wrap="none" lIns="0" tIns="99235" rIns="59541" bIns="0" rtlCol="0" anchor="t"/>
+          <a:bodyPr wrap="none" lIns="99235" tIns="0" rIns="59541" bIns="0" rtlCol="0" anchor="t"/>
           <a:lstStyle/>
           <a:p>
             <a:pPr algn="l" indent="0" marL="0">
@@ -5083,7 +3993,7 @@
           <a:ln/>
         </p:spPr>
         <p:txBody>
-          <a:bodyPr wrap="none" lIns="0" tIns="99235" rIns="59541" bIns="0" rtlCol="0" anchor="t"/>
+          <a:bodyPr wrap="none" lIns="99235" tIns="0" rIns="59541" bIns="0" rtlCol="0" anchor="t"/>
           <a:lstStyle/>
           <a:p>
             <a:pPr algn="l" indent="0" marL="0">
@@ -5164,7 +4074,7 @@
         </p:nvSpPr>
         <p:spPr>
           <a:xfrm>
-            <a:off x="5233360" y="1121866"/>
+            <a:off x="5233360" y="1931194"/>
             <a:ext cx="6296860" cy="1181298"/>
           </a:xfrm>
           <a:prstGeom prst="rect">
@@ -5202,365 +4112,14 @@
       </p:sp>
       <p:sp>
         <p:nvSpPr>
-          <p:cNvPr id="4" name="Shape 1"/>
+          <p:cNvPr id="4" name="Text 1"/>
           <p:cNvSpPr/>
           <p:nvPr/>
         </p:nvSpPr>
         <p:spPr>
           <a:xfrm>
-            <a:off x="5233360" y="2586633"/>
-            <a:ext cx="6296860" cy="3026569"/>
-          </a:xfrm>
-          <a:prstGeom prst="roundRect">
-            <a:avLst>
-              <a:gd name="adj" fmla="val 2623"/>
-            </a:avLst>
-          </a:prstGeom>
-          <a:solidFill>
-            <a:srgbClr val="D1E5FA"/>
-          </a:solidFill>
-          <a:ln w="19050">
-            <a:solidFill>
-              <a:srgbClr val="B7CBE0"/>
-            </a:solidFill>
-            <a:prstDash val="solid"/>
-          </a:ln>
-        </p:spPr>
-      </p:sp>
-      <p:sp>
-        <p:nvSpPr>
-          <p:cNvPr id="5" name="Shape 2"/>
-          <p:cNvSpPr/>
-          <p:nvPr/>
-        </p:nvSpPr>
-        <p:spPr>
-          <a:xfrm>
-            <a:off x="5252410" y="2605683"/>
-            <a:ext cx="6258761" cy="673298"/>
-          </a:xfrm>
-          <a:custGeom>
-            <a:avLst/>
-            <a:gdLst/>
-            <a:ahLst/>
-            <a:cxnLst/>
-            <a:rect l="l" t="t" r="r" b="b"/>
-            <a:pathLst>
-              <a:path w="6258761" h="673298">
-                <a:moveTo>
-                  <a:pt x="66156" y="0"/>
-                </a:moveTo>
-                <a:lnTo>
-                  <a:pt x="6192604" y="0"/>
-                </a:lnTo>
-                <a:arcTo hR="66158" wR="66156" stAng="16200000" swAng="5400000"/>
-                <a:lnTo>
-                  <a:pt x="6258761" y="673298"/>
-                </a:lnTo>
-                <a:lnTo>
-                  <a:pt x="0" y="673298"/>
-                </a:lnTo>
-                <a:lnTo>
-                  <a:pt x="0" y="66158"/>
-                </a:lnTo>
-                <a:arcTo hR="66158" wR="66156" stAng="10800000" swAng="5400000"/>
-                <a:close/>
-              </a:path>
-            </a:pathLst>
-          </a:custGeom>
-          <a:solidFill>
-            <a:srgbClr val="D1E5FA"/>
-          </a:solidFill>
-          <a:ln/>
-        </p:spPr>
-      </p:sp>
-      <p:sp>
-        <p:nvSpPr>
-          <p:cNvPr id="6" name="Text 3"/>
-          <p:cNvSpPr/>
-          <p:nvPr/>
-        </p:nvSpPr>
-        <p:spPr>
-          <a:xfrm>
-            <a:off x="5441417" y="2794695"/>
-            <a:ext cx="5880747" cy="295275"/>
-          </a:xfrm>
-          <a:prstGeom prst="rect">
-            <a:avLst/>
-          </a:prstGeom>
-          <a:noFill/>
-          <a:ln/>
-        </p:spPr>
-        <p:txBody>
-          <a:bodyPr wrap="none" lIns="0" tIns="0" rIns="0" bIns="0" rtlCol="0" anchor="t"/>
-          <a:lstStyle/>
-          <a:p>
-            <a:pPr algn="l" indent="0" marL="0">
-              <a:lnSpc>
-                <a:spcPct val="104000"/>
-              </a:lnSpc>
-              <a:buNone/>
-            </a:pPr>
-            <a:r>
-              <a:rPr lang="en-US" sz="1850" b="1" dirty="0">
-                <a:solidFill>
-                  <a:srgbClr val="1C1C1C"/>
-                </a:solidFill>
-                <a:latin typeface="Orbitron Bold" pitchFamily="34" charset="0"/>
-                <a:ea typeface="Orbitron Bold" pitchFamily="34" charset="-122"/>
-                <a:cs typeface="Orbitron Bold" pitchFamily="34" charset="-120"/>
-              </a:rPr>
-              <a:t>Spelled wrong: you get a suggestion</a:t>
-            </a:r>
-            <a:endParaRPr lang="en-US" sz="1850" dirty="0"/>
-          </a:p>
-        </p:txBody>
-      </p:sp>
-      <p:sp>
-        <p:nvSpPr>
-          <p:cNvPr id="7" name="Shape 4"/>
-          <p:cNvSpPr/>
-          <p:nvPr/>
-        </p:nvSpPr>
-        <p:spPr>
-          <a:xfrm>
-            <a:off x="5252410" y="3278981"/>
-            <a:ext cx="6258761" cy="673298"/>
-          </a:xfrm>
-          <a:prstGeom prst="rect">
-            <a:avLst/>
-          </a:prstGeom>
-          <a:solidFill>
-            <a:srgbClr val="D1E5FA"/>
-          </a:solidFill>
-          <a:ln/>
-        </p:spPr>
-      </p:sp>
-      <p:sp>
-        <p:nvSpPr>
-          <p:cNvPr id="8" name="Shape 5"/>
-          <p:cNvSpPr/>
-          <p:nvPr/>
-        </p:nvSpPr>
-        <p:spPr>
-          <a:xfrm>
-            <a:off x="5252410" y="3278981"/>
-            <a:ext cx="6258761" cy="25400"/>
-          </a:xfrm>
-          <a:prstGeom prst="roundRect">
-            <a:avLst>
-              <a:gd name="adj" fmla="val 49999"/>
-            </a:avLst>
-          </a:prstGeom>
-          <a:solidFill>
-            <a:srgbClr val="B7CBE0"/>
-          </a:solidFill>
-          <a:ln/>
-        </p:spPr>
-      </p:sp>
-      <p:sp>
-        <p:nvSpPr>
-          <p:cNvPr id="9" name="Text 6"/>
-          <p:cNvSpPr/>
-          <p:nvPr/>
-        </p:nvSpPr>
-        <p:spPr>
-          <a:xfrm>
-            <a:off x="5441417" y="3467993"/>
-            <a:ext cx="5880747" cy="295275"/>
-          </a:xfrm>
-          <a:prstGeom prst="rect">
-            <a:avLst/>
-          </a:prstGeom>
-          <a:noFill/>
-          <a:ln/>
-        </p:spPr>
-        <p:txBody>
-          <a:bodyPr wrap="none" lIns="0" tIns="0" rIns="0" bIns="0" rtlCol="0" anchor="t"/>
-          <a:lstStyle/>
-          <a:p>
-            <a:pPr algn="l" indent="0" marL="0">
-              <a:lnSpc>
-                <a:spcPct val="104000"/>
-              </a:lnSpc>
-              <a:buNone/>
-            </a:pPr>
-            <a:r>
-              <a:rPr lang="en-US" sz="1850" b="1" dirty="0">
-                <a:solidFill>
-                  <a:srgbClr val="1C1C1C"/>
-                </a:solidFill>
-                <a:latin typeface="Orbitron Bold" pitchFamily="34" charset="0"/>
-                <a:ea typeface="Orbitron Bold" pitchFamily="34" charset="-122"/>
-                <a:cs typeface="Orbitron Bold" pitchFamily="34" charset="-120"/>
-              </a:rPr>
-              <a:t>Used too early: you get no suggestion</a:t>
-            </a:r>
-            <a:endParaRPr lang="en-US" sz="1850" dirty="0"/>
-          </a:p>
-        </p:txBody>
-      </p:sp>
-      <p:sp>
-        <p:nvSpPr>
-          <p:cNvPr id="10" name="Shape 7"/>
-          <p:cNvSpPr/>
-          <p:nvPr/>
-        </p:nvSpPr>
-        <p:spPr>
-          <a:xfrm>
-            <a:off x="5252410" y="3952280"/>
-            <a:ext cx="6258761" cy="673298"/>
-          </a:xfrm>
-          <a:prstGeom prst="rect">
-            <a:avLst/>
-          </a:prstGeom>
-          <a:solidFill>
-            <a:srgbClr val="D1E5FA"/>
-          </a:solidFill>
-          <a:ln/>
-        </p:spPr>
-      </p:sp>
-      <p:sp>
-        <p:nvSpPr>
-          <p:cNvPr id="11" name="Shape 8"/>
-          <p:cNvSpPr/>
-          <p:nvPr/>
-        </p:nvSpPr>
-        <p:spPr>
-          <a:xfrm>
-            <a:off x="5252410" y="3952280"/>
-            <a:ext cx="6258761" cy="25400"/>
-          </a:xfrm>
-          <a:prstGeom prst="roundRect">
-            <a:avLst>
-              <a:gd name="adj" fmla="val 49999"/>
-            </a:avLst>
-          </a:prstGeom>
-          <a:solidFill>
-            <a:srgbClr val="B7CBE0"/>
-          </a:solidFill>
-          <a:ln/>
-        </p:spPr>
-      </p:sp>
-      <p:sp>
-        <p:nvSpPr>
-          <p:cNvPr id="12" name="Text 9"/>
-          <p:cNvSpPr/>
-          <p:nvPr/>
-        </p:nvSpPr>
-        <p:spPr>
-          <a:xfrm>
-            <a:off x="5441417" y="4141291"/>
-            <a:ext cx="5880747" cy="295275"/>
-          </a:xfrm>
-          <a:prstGeom prst="rect">
-            <a:avLst/>
-          </a:prstGeom>
-          <a:noFill/>
-          <a:ln/>
-        </p:spPr>
-        <p:txBody>
-          <a:bodyPr wrap="none" lIns="0" tIns="0" rIns="0" bIns="0" rtlCol="0" anchor="t"/>
-          <a:lstStyle/>
-          <a:p>
-            <a:pPr algn="l" indent="0" marL="0">
-              <a:lnSpc>
-                <a:spcPct val="104000"/>
-              </a:lnSpc>
-              <a:buNone/>
-            </a:pPr>
-            <a:r>
-              <a:rPr lang="en-US" sz="1850" b="1" dirty="0">
-                <a:solidFill>
-                  <a:srgbClr val="1C1C1C"/>
-                </a:solidFill>
-                <a:latin typeface="Orbitron Bold" pitchFamily="34" charset="0"/>
-                <a:ea typeface="Orbitron Bold" pitchFamily="34" charset="-122"/>
-                <a:cs typeface="Orbitron Bold" pitchFamily="34" charset="-120"/>
-              </a:rPr>
-              <a:t>Python runs top to bottom</a:t>
-            </a:r>
-            <a:endParaRPr lang="en-US" sz="1850" dirty="0"/>
-          </a:p>
-        </p:txBody>
-      </p:sp>
-      <p:sp>
-        <p:nvSpPr>
-          <p:cNvPr id="13" name="Shape 10"/>
-          <p:cNvSpPr/>
-          <p:nvPr/>
-        </p:nvSpPr>
-        <p:spPr>
-          <a:xfrm>
-            <a:off x="5252410" y="4625578"/>
-            <a:ext cx="6258761" cy="968573"/>
-          </a:xfrm>
-          <a:custGeom>
-            <a:avLst/>
-            <a:gdLst/>
-            <a:ahLst/>
-            <a:cxnLst/>
-            <a:rect l="l" t="t" r="r" b="b"/>
-            <a:pathLst>
-              <a:path w="6258761" h="968573">
-                <a:moveTo>
-                  <a:pt x="0" y="0"/>
-                </a:moveTo>
-                <a:lnTo>
-                  <a:pt x="6258761" y="0"/>
-                </a:lnTo>
-                <a:lnTo>
-                  <a:pt x="6258761" y="902415"/>
-                </a:lnTo>
-                <a:arcTo hR="66158" wR="66156" stAng="0" swAng="5400000"/>
-                <a:lnTo>
-                  <a:pt x="66156" y="968573"/>
-                </a:lnTo>
-                <a:arcTo hR="66158" wR="66156" stAng="5400000" swAng="5400000"/>
-                <a:lnTo>
-                  <a:pt x="0" y="0"/>
-                </a:lnTo>
-                <a:close/>
-              </a:path>
-            </a:pathLst>
-          </a:custGeom>
-          <a:solidFill>
-            <a:srgbClr val="D1E5FA"/>
-          </a:solidFill>
-          <a:ln/>
-        </p:spPr>
-      </p:sp>
-      <p:sp>
-        <p:nvSpPr>
-          <p:cNvPr id="14" name="Shape 11"/>
-          <p:cNvSpPr/>
-          <p:nvPr/>
-        </p:nvSpPr>
-        <p:spPr>
-          <a:xfrm>
-            <a:off x="5252410" y="4625578"/>
-            <a:ext cx="6258761" cy="25400"/>
-          </a:xfrm>
-          <a:prstGeom prst="roundRect">
-            <a:avLst>
-              <a:gd name="adj" fmla="val 49999"/>
-            </a:avLst>
-          </a:prstGeom>
-          <a:solidFill>
-            <a:srgbClr val="B7CBE0"/>
-          </a:solidFill>
-          <a:ln/>
-        </p:spPr>
-      </p:sp>
-      <p:sp>
-        <p:nvSpPr>
-          <p:cNvPr id="15" name="Text 12"/>
-          <p:cNvSpPr/>
-          <p:nvPr/>
-        </p:nvSpPr>
-        <p:spPr>
-          <a:xfrm>
-            <a:off x="5441417" y="4814590"/>
-            <a:ext cx="5880747" cy="590550"/>
+            <a:off x="5233360" y="3395960"/>
+            <a:ext cx="6296860" cy="1407914"/>
           </a:xfrm>
           <a:prstGeom prst="rect">
             <a:avLst/>
@@ -5574,30 +4133,94 @@
           </a:bodyPr>
           <a:lstStyle/>
           <a:p>
-            <a:pPr algn="l" indent="0" marL="0">
-              <a:lnSpc>
-                <a:spcPct val="104000"/>
-              </a:lnSpc>
-              <a:buNone/>
-            </a:pPr>
-            <a:r>
-              <a:rPr lang="en-US" sz="1850" b="1" dirty="0">
+            <a:pPr algn="l" marL="294640" indent="-294640">
+              <a:lnSpc>
+                <a:spcPct val="133000"/>
+              </a:lnSpc>
+              <a:buSzPct val="100000"/>
+              <a:buChar char="•"/>
+            </a:pPr>
+            <a:r>
+              <a:rPr lang="en-US" sz="1450" dirty="0">
                 <a:solidFill>
                   <a:srgbClr val="1C1C1C"/>
                 </a:solidFill>
-                <a:latin typeface="Orbitron Bold" pitchFamily="34" charset="0"/>
-                <a:ea typeface="Orbitron Bold" pitchFamily="34" charset="-122"/>
-                <a:cs typeface="Orbitron Bold" pitchFamily="34" charset="-120"/>
+                <a:latin typeface="Roboto Condensed" pitchFamily="34" charset="0"/>
+                <a:ea typeface="Roboto Condensed" pitchFamily="34" charset="-122"/>
+                <a:cs typeface="Roboto Condensed" pitchFamily="34" charset="-120"/>
+              </a:rPr>
+              <a:t>Spelled wrong: you get a suggestion</a:t>
+            </a:r>
+            <a:endParaRPr lang="en-US" sz="1450" dirty="0"/>
+          </a:p>
+          <a:p>
+            <a:pPr algn="l" marL="294640" indent="-294640">
+              <a:lnSpc>
+                <a:spcPct val="133000"/>
+              </a:lnSpc>
+              <a:buSzPct val="100000"/>
+              <a:buChar char="•"/>
+            </a:pPr>
+            <a:r>
+              <a:rPr lang="en-US" sz="1450" dirty="0">
+                <a:solidFill>
+                  <a:srgbClr val="1C1C1C"/>
+                </a:solidFill>
+                <a:latin typeface="Roboto Condensed" pitchFamily="34" charset="0"/>
+                <a:ea typeface="Roboto Condensed" pitchFamily="34" charset="-122"/>
+                <a:cs typeface="Roboto Condensed" pitchFamily="34" charset="-120"/>
+              </a:rPr>
+              <a:t>Used too early: you get no suggestion</a:t>
+            </a:r>
+            <a:endParaRPr lang="en-US" sz="1450" dirty="0"/>
+          </a:p>
+          <a:p>
+            <a:pPr algn="l" marL="294640" indent="-294640">
+              <a:lnSpc>
+                <a:spcPct val="133000"/>
+              </a:lnSpc>
+              <a:buSzPct val="100000"/>
+              <a:buChar char="•"/>
+            </a:pPr>
+            <a:r>
+              <a:rPr lang="en-US" sz="1450" dirty="0">
+                <a:solidFill>
+                  <a:srgbClr val="1C1C1C"/>
+                </a:solidFill>
+                <a:latin typeface="Roboto Condensed" pitchFamily="34" charset="0"/>
+                <a:ea typeface="Roboto Condensed" pitchFamily="34" charset="-122"/>
+                <a:cs typeface="Roboto Condensed" pitchFamily="34" charset="-120"/>
+              </a:rPr>
+              <a:t>Python runs top to bottom</a:t>
+            </a:r>
+            <a:endParaRPr lang="en-US" sz="1450" dirty="0"/>
+          </a:p>
+          <a:p>
+            <a:pPr algn="l" marL="294640" indent="-294640">
+              <a:lnSpc>
+                <a:spcPct val="133000"/>
+              </a:lnSpc>
+              <a:buSzPct val="100000"/>
+              <a:buChar char="•"/>
+            </a:pPr>
+            <a:r>
+              <a:rPr lang="en-US" sz="1450" dirty="0">
+                <a:solidFill>
+                  <a:srgbClr val="1C1C1C"/>
+                </a:solidFill>
+                <a:latin typeface="Roboto Condensed" pitchFamily="34" charset="0"/>
+                <a:ea typeface="Roboto Condensed" pitchFamily="34" charset="-122"/>
+                <a:cs typeface="Roboto Condensed" pitchFamily="34" charset="-120"/>
               </a:rPr>
               <a:t>A name below the line that uses it does not exist yet</a:t>
             </a:r>
-            <a:endParaRPr lang="en-US" sz="1850" dirty="0"/>
-          </a:p>
-        </p:txBody>
-      </p:sp>
-      <p:sp>
-        <p:nvSpPr>
-          <p:cNvPr id="16" name="Text 13"/>
+            <a:endParaRPr lang="en-US" sz="1450" dirty="0"/>
+          </a:p>
+        </p:txBody>
+      </p:sp>
+      <p:sp>
+        <p:nvSpPr>
+          <p:cNvPr id="5" name="Text 2"/>
           <p:cNvSpPr/>
           <p:nvPr/>
         </p:nvSpPr>
@@ -5613,7 +4236,7 @@
           <a:ln/>
         </p:spPr>
         <p:txBody>
-          <a:bodyPr wrap="none" lIns="0" tIns="99235" rIns="59541" bIns="0" rtlCol="0" anchor="t"/>
+          <a:bodyPr wrap="none" lIns="99235" tIns="0" rIns="59541" bIns="0" rtlCol="0" anchor="t"/>
           <a:lstStyle/>
           <a:p>
             <a:pPr algn="l" indent="0" marL="0">
